--- a/assets/ppts/M3.2_Error_Detection_Correction_Flow.pptx
+++ b/assets/ppts/M3.2_Error_Detection_Correction_Flow.pptx
@@ -9,6 +9,8 @@
     <p:sldId id="257" r:id="rId8"/>
     <p:sldId id="258" r:id="rId9"/>
     <p:sldId id="259" r:id="rId10"/>
+    <p:sldId id="260" r:id="rId11"/>
+    <p:sldId id="261" r:id="rId12"/>
   </p:sldIdLst>
   <p:sldSz cx="12191695" cy="6858000" type="screen4x3"/>
   <p:notesSz cx="6858000" cy="9144000"/>
@@ -3142,8 +3144,8 @@
         </p:nvSpPr>
         <p:spPr>
           <a:xfrm>
-            <a:off x="822960" y="1188720"/>
-            <a:ext cx="164592" cy="4480560"/>
+            <a:off x="0" y="0"/>
+            <a:ext cx="12191695" cy="137160"/>
           </a:xfrm>
           <a:prstGeom prst="rect">
             <a:avLst/>
@@ -3179,14 +3181,57 @@
       </p:sp>
       <p:sp>
         <p:nvSpPr>
-          <p:cNvPr id="4" name="TextBox 3"/>
+          <p:cNvPr id="4" name="Rectangle 3"/>
+          <p:cNvSpPr/>
+          <p:nvPr/>
+        </p:nvSpPr>
+        <p:spPr>
+          <a:xfrm>
+            <a:off x="822960" y="1097280"/>
+            <a:ext cx="164592" cy="4663440"/>
+          </a:xfrm>
+          <a:prstGeom prst="rect">
+            <a:avLst/>
+          </a:prstGeom>
+          <a:solidFill>
+            <a:srgbClr val="D97706"/>
+          </a:solidFill>
+          <a:ln>
+            <a:noFill/>
+          </a:ln>
+        </p:spPr>
+        <p:style>
+          <a:lnRef idx="1">
+            <a:schemeClr val="accent1"/>
+          </a:lnRef>
+          <a:fillRef idx="3">
+            <a:schemeClr val="accent1"/>
+          </a:fillRef>
+          <a:effectRef idx="2">
+            <a:schemeClr val="accent1"/>
+          </a:effectRef>
+          <a:fontRef idx="minor">
+            <a:schemeClr val="lt1"/>
+          </a:fontRef>
+        </p:style>
+        <p:txBody>
+          <a:bodyPr rtlCol="0" anchor="ctr"/>
+          <a:lstStyle/>
+          <a:p>
+            <a:pPr algn="ctr"/>
+          </a:p>
+        </p:txBody>
+      </p:sp>
+      <p:sp>
+        <p:nvSpPr>
+          <p:cNvPr id="5" name="TextBox 4"/>
           <p:cNvSpPr txBox="1"/>
           <p:nvPr/>
         </p:nvSpPr>
         <p:spPr>
           <a:xfrm>
-            <a:off x="1280160" y="1097280"/>
-            <a:ext cx="10058400" cy="4663440"/>
+            <a:off x="1234440" y="1005840"/>
+            <a:ext cx="10241280" cy="4846320"/>
           </a:xfrm>
           <a:prstGeom prst="rect">
             <a:avLst/>
@@ -3201,70 +3246,165 @@
           <a:p>
             <a:pPr>
               <a:spcAft>
+                <a:spcPts val="1000"/>
+              </a:spcAft>
+              <a:defRPr b="1" sz="1300">
+                <a:solidFill>
+                  <a:srgbClr val="D97706"/>
+                </a:solidFill>
+              </a:defRPr>
+            </a:pPr>
+            <a:r>
+              <a:t>PCCST501 Computer Networks | KTU 2024 Scheme • MODULE 3 • M3.2</a:t>
+            </a:r>
+          </a:p>
+          <a:p>
+            <a:pPr>
+              <a:spcAft>
                 <a:spcPts val="1200"/>
               </a:spcAft>
-              <a:defRPr b="1" sz="1300">
+              <a:defRPr b="1" sz="3000">
+                <a:solidFill>
+                  <a:srgbClr val="F8FAFC"/>
+                </a:solidFill>
+              </a:defRPr>
+            </a:pPr>
+            <a:r>
+              <a:t>Data Link Control: Error Detection, Correction &amp; Flow Control</a:t>
+            </a:r>
+          </a:p>
+          <a:p>
+            <a:pPr>
+              <a:spcAft>
+                <a:spcPts val="2400"/>
+              </a:spcAft>
+              <a:defRPr sz="1600">
+                <a:solidFill>
+                  <a:srgbClr val="94A3B8"/>
+                </a:solidFill>
+              </a:defRPr>
+            </a:pPr>
+            <a:r>
+              <a:t>Hamming Distance, 2D Parity, Internet Checksum, CRC-32 Modulo-2 Division, Hamming (7,4) Code, Stop-and-Wait, Go-Back-N, Selective Repeat</a:t>
+            </a:r>
+          </a:p>
+          <a:p>
+            <a:pPr>
+              <a:spcAft>
+                <a:spcPts val="300"/>
+              </a:spcAft>
+              <a:defRPr b="1" sz="1350">
+                <a:solidFill>
+                  <a:srgbClr val="E2E8F0"/>
+                </a:solidFill>
+              </a:defRPr>
+            </a:pPr>
+            <a:r>
+              <a:t>Prepared by: Prof. Anju Markose | Assistant Professor, Dept. of CSE | VJCET</a:t>
+            </a:r>
+          </a:p>
+          <a:p>
+            <a:pPr>
+              <a:defRPr sz="1150">
+                <a:solidFill>
+                  <a:srgbClr val="94A3B8"/>
+                </a:solidFill>
+              </a:defRPr>
+            </a:pPr>
+            <a:r>
+              <a:t>Viswajyothi College of Engineering and Technology (VJCET), Vazhakulam • KTU S5 CSE</a:t>
+            </a:r>
+          </a:p>
+        </p:txBody>
+      </p:sp>
+      <p:sp>
+        <p:nvSpPr>
+          <p:cNvPr id="6" name="Rounded Rectangle 5"/>
+          <p:cNvSpPr/>
+          <p:nvPr/>
+        </p:nvSpPr>
+        <p:spPr>
+          <a:xfrm>
+            <a:off x="8412480" y="5120640"/>
+            <a:ext cx="3017520" cy="822960"/>
+          </a:xfrm>
+          <a:prstGeom prst="roundRect">
+            <a:avLst/>
+          </a:prstGeom>
+          <a:solidFill>
+            <a:srgbClr val="1E293B"/>
+          </a:solidFill>
+          <a:ln w="12700">
+            <a:solidFill>
+              <a:srgbClr val="0E7490"/>
+            </a:solidFill>
+          </a:ln>
+        </p:spPr>
+        <p:style>
+          <a:lnRef idx="1">
+            <a:schemeClr val="accent1"/>
+          </a:lnRef>
+          <a:fillRef idx="3">
+            <a:schemeClr val="accent1"/>
+          </a:fillRef>
+          <a:effectRef idx="2">
+            <a:schemeClr val="accent1"/>
+          </a:effectRef>
+          <a:fontRef idx="minor">
+            <a:schemeClr val="lt1"/>
+          </a:fontRef>
+        </p:style>
+        <p:txBody>
+          <a:bodyPr rtlCol="0" anchor="ctr"/>
+          <a:lstStyle/>
+          <a:p>
+            <a:pPr algn="ctr"/>
+          </a:p>
+        </p:txBody>
+      </p:sp>
+      <p:sp>
+        <p:nvSpPr>
+          <p:cNvPr id="7" name="TextBox 6"/>
+          <p:cNvSpPr txBox="1"/>
+          <p:nvPr/>
+        </p:nvSpPr>
+        <p:spPr>
+          <a:xfrm>
+            <a:off x="8503920" y="5166360"/>
+            <a:ext cx="2834640" cy="731520"/>
+          </a:xfrm>
+          <a:prstGeom prst="rect">
+            <a:avLst/>
+          </a:prstGeom>
+          <a:noFill/>
+        </p:spPr>
+        <p:txBody>
+          <a:bodyPr wrap="none">
+            <a:spAutoFit/>
+          </a:bodyPr>
+          <a:lstStyle/>
+          <a:p>
+            <a:pPr>
+              <a:defRPr b="1" sz="1050">
                 <a:solidFill>
                   <a:srgbClr val="D97706"/>
                 </a:solidFill>
               </a:defRPr>
             </a:pPr>
             <a:r>
-              <a:t>PCCST501 Computer Networks | KTU 2024 Scheme • MODULE 3 • M3.2</a:t>
-            </a:r>
-          </a:p>
-          <a:p>
-            <a:pPr>
-              <a:spcAft>
-                <a:spcPts val="1400"/>
-              </a:spcAft>
-              <a:defRPr b="1" sz="3200">
+              <a:t>KTU B.Tech Curriculum</a:t>
+            </a:r>
+          </a:p>
+          <a:p>
+            <a:pPr>
+              <a:defRPr sz="950">
                 <a:solidFill>
                   <a:srgbClr val="F8FAFC"/>
                 </a:solidFill>
               </a:defRPr>
             </a:pPr>
             <a:r>
-              <a:t>Error Control &amp; Flow Control in Data Link Layer</a:t>
-            </a:r>
-          </a:p>
-          <a:p>
-            <a:pPr>
-              <a:spcAft>
-                <a:spcPts val="2800"/>
-              </a:spcAft>
-              <a:defRPr sz="1700">
-                <a:solidFill>
-                  <a:srgbClr val="94A3B8"/>
-                </a:solidFill>
-              </a:defRPr>
-            </a:pPr>
-            <a:r>
-              <a:t>CRC-32 Modulo-2 Polynomial Division, Hamming (7,4) Error Correction, Stop-and-Wait, Go-Back-N &amp; Selective Repeat</a:t>
-            </a:r>
-          </a:p>
-          <a:p>
-            <a:pPr>
-              <a:defRPr b="1" sz="1300">
-                <a:solidFill>
-                  <a:srgbClr val="E2E8F0"/>
-                </a:solidFill>
-              </a:defRPr>
-            </a:pPr>
-            <a:r>
-              <a:t>Prepared by: Prof. Anju Markose | Assistant Professor, Dept. of CSE | VJCET</a:t>
-            </a:r>
-          </a:p>
-          <a:p>
-            <a:pPr>
-              <a:defRPr sz="1100">
-                <a:solidFill>
-                  <a:srgbClr val="94A3B8"/>
-                </a:solidFill>
-              </a:defRPr>
-            </a:pPr>
-            <a:r>
-              <a:t>Viswajyothi College of Engineering and Technology (VJCET), Vazhakulam</a:t>
+              <a:t>Official Classroom Slide Deck</a:t>
             </a:r>
           </a:p>
         </p:txBody>
@@ -3396,14 +3536,14 @@
           <a:lstStyle/>
           <a:p>
             <a:pPr>
-              <a:defRPr b="1" sz="2300">
+              <a:defRPr b="1" sz="2200">
                 <a:solidFill>
                   <a:srgbClr val="F8FAFC"/>
                 </a:solidFill>
               </a:defRPr>
             </a:pPr>
             <a:r>
-              <a:t>3.2.1 Error Detection: Cyclic Redundancy Check (CRC)</a:t>
+              <a:t>3.2.1 Block Coding &amp; Hamming Distance Theory</a:t>
             </a:r>
           </a:p>
         </p:txBody>
@@ -3438,7 +3578,7 @@
               </a:defRPr>
             </a:pPr>
             <a:r>
-              <a:t>M3.2 CRC POLYNOMIAL</a:t>
+              <a:t>M3.2 ERROR CONTROL THEORY</a:t>
             </a:r>
           </a:p>
         </p:txBody>
@@ -3451,7 +3591,7 @@
         </p:nvSpPr>
         <p:spPr>
           <a:xfrm>
-            <a:off x="731520" y="1280160"/>
+            <a:off x="731520" y="1234440"/>
             <a:ext cx="6858000" cy="4937760"/>
           </a:xfrm>
           <a:prstGeom prst="rect">
@@ -3469,29 +3609,29 @@
               <a:spcAft>
                 <a:spcPts val="200"/>
               </a:spcAft>
-              <a:defRPr b="1" sz="1500">
+              <a:defRPr b="1" sz="1450">
                 <a:solidFill>
                   <a:srgbClr val="0F1E4A"/>
                 </a:solidFill>
               </a:defRPr>
             </a:pPr>
             <a:r>
-              <a:t>• CRC Concept</a:t>
-            </a:r>
-          </a:p>
-          <a:p>
-            <a:pPr>
-              <a:spcAft>
-                <a:spcPts val="800"/>
-              </a:spcAft>
-              <a:defRPr sz="1300">
-                <a:solidFill>
-                  <a:srgbClr val="1E293B"/>
-                </a:solidFill>
-              </a:defRPr>
-            </a:pPr>
-            <a:r>
-              <a:t>   Powerful polynomial-based error detection method based on binary Modulo-2 division (XOR operations without carry).</a:t>
+              <a:t>• Block Coding Principles</a:t>
+            </a:r>
+          </a:p>
+          <a:p>
+            <a:pPr>
+              <a:spcAft>
+                <a:spcPts val="700"/>
+              </a:spcAft>
+              <a:defRPr sz="1250">
+                <a:solidFill>
+                  <a:srgbClr val="0F172A"/>
+                </a:solidFill>
+              </a:defRPr>
+            </a:pPr>
+            <a:r>
+              <a:t>   Dataword of $k$ bits encoded into Codeword of $n$ bits ($n &gt; k$) by appending $r = n - k$ redundant parity bits.</a:t>
             </a:r>
           </a:p>
           <a:p>
@@ -3499,29 +3639,29 @@
               <a:spcAft>
                 <a:spcPts val="200"/>
               </a:spcAft>
-              <a:defRPr b="1" sz="1500">
+              <a:defRPr b="1" sz="1450">
                 <a:solidFill>
                   <a:srgbClr val="0F1E4A"/>
                 </a:solidFill>
               </a:defRPr>
             </a:pPr>
             <a:r>
-              <a:t>• Generator Polynomial $G(x)$</a:t>
-            </a:r>
-          </a:p>
-          <a:p>
-            <a:pPr>
-              <a:spcAft>
-                <a:spcPts val="800"/>
-              </a:spcAft>
-              <a:defRPr sz="1300">
-                <a:solidFill>
-                  <a:srgbClr val="1E293B"/>
-                </a:solidFill>
-              </a:defRPr>
-            </a:pPr>
-            <a:r>
-              <a:t>   Agreed polynomial of degree $r$ (represented as an $(r+1)$-bit divisor). E.g., CRC-32 has $r=32$ bits.</a:t>
+              <a:t>• Hamming Distance $d(x,y)$</a:t>
+            </a:r>
+          </a:p>
+          <a:p>
+            <a:pPr>
+              <a:spcAft>
+                <a:spcPts val="700"/>
+              </a:spcAft>
+              <a:defRPr sz="1250">
+                <a:solidFill>
+                  <a:srgbClr val="0F172A"/>
+                </a:solidFill>
+              </a:defRPr>
+            </a:pPr>
+            <a:r>
+              <a:t>   The number of bit positions in which two codewords $x$ and $y$ differ (computed by taking XOR and counting number of 1s).</a:t>
             </a:r>
           </a:p>
           <a:p>
@@ -3529,29 +3669,29 @@
               <a:spcAft>
                 <a:spcPts val="200"/>
               </a:spcAft>
-              <a:defRPr b="1" sz="1500">
+              <a:defRPr b="1" sz="1450">
                 <a:solidFill>
                   <a:srgbClr val="0F1E4A"/>
                 </a:solidFill>
               </a:defRPr>
             </a:pPr>
             <a:r>
-              <a:t>• Sender FCS Generation</a:t>
-            </a:r>
-          </a:p>
-          <a:p>
-            <a:pPr>
-              <a:spcAft>
-                <a:spcPts val="800"/>
-              </a:spcAft>
-              <a:defRPr sz="1300">
-                <a:solidFill>
-                  <a:srgbClr val="1E293B"/>
-                </a:solidFill>
-              </a:defRPr>
-            </a:pPr>
-            <a:r>
-              <a:t>   Append $r$ zeros to the data block $D$. Perform Modulo-2 division of $D \cdot 2^r$ by divisor $G$. The remainder $R$ (of length $r$ bits) is the Frame Check Sequence (FCS). Frame sent is $T = D \cdot 2^r \oplus R$.</a:t>
+              <a:t>• Minimum Hamming Distance ($d_{min}$)</a:t>
+            </a:r>
+          </a:p>
+          <a:p>
+            <a:pPr>
+              <a:spcAft>
+                <a:spcPts val="700"/>
+              </a:spcAft>
+              <a:defRPr sz="1250">
+                <a:solidFill>
+                  <a:srgbClr val="0F172A"/>
+                </a:solidFill>
+              </a:defRPr>
+            </a:pPr>
+            <a:r>
+              <a:t>   The smallest Hamming distance between any pair of valid codewords in the codebook.</a:t>
             </a:r>
           </a:p>
           <a:p>
@@ -3559,29 +3699,29 @@
               <a:spcAft>
                 <a:spcPts val="200"/>
               </a:spcAft>
-              <a:defRPr b="1" sz="1500">
+              <a:defRPr b="1" sz="1450">
                 <a:solidFill>
                   <a:srgbClr val="0F1E4A"/>
                 </a:solidFill>
               </a:defRPr>
             </a:pPr>
             <a:r>
-              <a:t>• Receiver Verification</a:t>
-            </a:r>
-          </a:p>
-          <a:p>
-            <a:pPr>
-              <a:spcAft>
-                <a:spcPts val="800"/>
-              </a:spcAft>
-              <a:defRPr sz="1300">
-                <a:solidFill>
-                  <a:srgbClr val="1E293B"/>
-                </a:solidFill>
-              </a:defRPr>
-            </a:pPr>
-            <a:r>
-              <a:t>   Receiver divides arriving frame $T$ by divisor $G$. If remainder is EXACTLY ZERO, frame is accepted as error-free; otherwise discarded.</a:t>
+              <a:t>• Error Detection Capability</a:t>
+            </a:r>
+          </a:p>
+          <a:p>
+            <a:pPr>
+              <a:spcAft>
+                <a:spcPts val="700"/>
+              </a:spcAft>
+              <a:defRPr sz="1250">
+                <a:solidFill>
+                  <a:srgbClr val="0F172A"/>
+                </a:solidFill>
+              </a:defRPr>
+            </a:pPr>
+            <a:r>
+              <a:t>   To detect up to $s$ bit errors: $d_{min} \ge s + 1$ (e.g., Simple Parity has $d_{min} = 2$, detects single-bit errors $s = 1$).</a:t>
             </a:r>
           </a:p>
           <a:p>
@@ -3589,29 +3729,29 @@
               <a:spcAft>
                 <a:spcPts val="200"/>
               </a:spcAft>
-              <a:defRPr b="1" sz="1500">
+              <a:defRPr b="1" sz="1450">
                 <a:solidFill>
                   <a:srgbClr val="0F1E4A"/>
                 </a:solidFill>
               </a:defRPr>
             </a:pPr>
             <a:r>
-              <a:t>• Error Detection Strength</a:t>
-            </a:r>
-          </a:p>
-          <a:p>
-            <a:pPr>
-              <a:spcAft>
-                <a:spcPts val="800"/>
-              </a:spcAft>
-              <a:defRPr sz="1300">
-                <a:solidFill>
-                  <a:srgbClr val="1E293B"/>
-                </a:solidFill>
-              </a:defRPr>
-            </a:pPr>
-            <a:r>
-              <a:t>   Detects all single-bit errors, all double errors, all odd numbers of bit errors, and all burst errors of length $\le r$.</a:t>
+              <a:t>• Error Correction Capability</a:t>
+            </a:r>
+          </a:p>
+          <a:p>
+            <a:pPr>
+              <a:spcAft>
+                <a:spcPts val="700"/>
+              </a:spcAft>
+              <a:defRPr sz="1250">
+                <a:solidFill>
+                  <a:srgbClr val="0F172A"/>
+                </a:solidFill>
+              </a:defRPr>
+            </a:pPr>
+            <a:r>
+              <a:t>   To correct up to $t$ bit errors: $d_{min} \ge 2t + 1$ (e.g., Single-bit error correction $t = 1$ requires $d_{min} \ge 3$).</a:t>
             </a:r>
           </a:p>
         </p:txBody>
@@ -3624,14 +3764,14 @@
         </p:nvSpPr>
         <p:spPr>
           <a:xfrm>
-            <a:off x="7955279" y="1280160"/>
-            <a:ext cx="3566160" cy="4846320"/>
+            <a:off x="7955279" y="1234440"/>
+            <a:ext cx="3566160" cy="4892040"/>
           </a:xfrm>
           <a:prstGeom prst="roundRect">
             <a:avLst/>
           </a:prstGeom>
           <a:solidFill>
-            <a:srgbClr val="F1F5F9"/>
+            <a:srgbClr val="F8FAFC"/>
           </a:solidFill>
           <a:ln w="19050">
             <a:solidFill>
@@ -3669,7 +3809,7 @@
         </p:nvSpPr>
         <p:spPr>
           <a:xfrm>
-            <a:off x="8138160" y="1417320"/>
+            <a:off x="8138160" y="1371600"/>
             <a:ext cx="3200400" cy="4572000"/>
           </a:xfrm>
           <a:prstGeom prst="rect">
@@ -3694,7 +3834,7 @@
               </a:defRPr>
             </a:pPr>
             <a:r>
-              <a:t>CRC Algorithm Steps</a:t>
+              <a:t>Hamming Distance Rules</a:t>
             </a:r>
           </a:p>
           <a:p>
@@ -3704,12 +3844,12 @@
               </a:spcAft>
               <a:defRPr sz="1200">
                 <a:solidFill>
-                  <a:srgbClr val="1E293B"/>
-                </a:solidFill>
-              </a:defRPr>
-            </a:pPr>
-            <a:r>
-              <a:t>→ 1. Let divisor G have length k</a:t>
+                  <a:srgbClr val="0F172A"/>
+                </a:solidFill>
+              </a:defRPr>
+            </a:pPr>
+            <a:r>
+              <a:t>→ Detect s errors: d_min &gt;= s + 1</a:t>
             </a:r>
           </a:p>
           <a:p>
@@ -3719,12 +3859,12 @@
               </a:spcAft>
               <a:defRPr sz="1200">
                 <a:solidFill>
-                  <a:srgbClr val="1E293B"/>
-                </a:solidFill>
-              </a:defRPr>
-            </a:pPr>
-            <a:r>
-              <a:t>→ 2. Append (k - 1) zeros to Data</a:t>
+                  <a:srgbClr val="0F172A"/>
+                </a:solidFill>
+              </a:defRPr>
+            </a:pPr>
+            <a:r>
+              <a:t>→ Correct t errors: d_min &gt;= 2t + 1</a:t>
             </a:r>
           </a:p>
           <a:p>
@@ -3734,12 +3874,12 @@
               </a:spcAft>
               <a:defRPr sz="1200">
                 <a:solidFill>
-                  <a:srgbClr val="1E293B"/>
-                </a:solidFill>
-              </a:defRPr>
-            </a:pPr>
-            <a:r>
-              <a:t>→ 3. Divide using XOR Modulo-2</a:t>
+                  <a:srgbClr val="0F172A"/>
+                </a:solidFill>
+              </a:defRPr>
+            </a:pPr>
+            <a:r>
+              <a:t>→ Simple Parity: d_min = 2</a:t>
             </a:r>
           </a:p>
           <a:p>
@@ -3749,12 +3889,12 @@
               </a:spcAft>
               <a:defRPr sz="1200">
                 <a:solidFill>
-                  <a:srgbClr val="1E293B"/>
-                </a:solidFill>
-              </a:defRPr>
-            </a:pPr>
-            <a:r>
-              <a:t>→ 4. Remainder = FCS (Checksum)</a:t>
+                  <a:srgbClr val="0F172A"/>
+                </a:solidFill>
+              </a:defRPr>
+            </a:pPr>
+            <a:r>
+              <a:t>→ Hamming (7,4): d_min = 3</a:t>
             </a:r>
           </a:p>
           <a:p>
@@ -3764,27 +3904,12 @@
               </a:spcAft>
               <a:defRPr sz="1200">
                 <a:solidFill>
-                  <a:srgbClr val="1E293B"/>
-                </a:solidFill>
-              </a:defRPr>
-            </a:pPr>
-            <a:r>
-              <a:t>→ 5. Transmit Data + FCS</a:t>
-            </a:r>
-          </a:p>
-          <a:p>
-            <a:pPr>
-              <a:spcAft>
-                <a:spcPts val="600"/>
-              </a:spcAft>
-              <a:defRPr sz="1200">
-                <a:solidFill>
-                  <a:srgbClr val="1E293B"/>
-                </a:solidFill>
-              </a:defRPr>
-            </a:pPr>
-            <a:r>
-              <a:t>→ 6. Receiver Remainder must be 0</a:t>
+                  <a:srgbClr val="0F172A"/>
+                </a:solidFill>
+              </a:defRPr>
+            </a:pPr>
+            <a:r>
+              <a:t>→ r parity bits: 2^r &gt;= k + r + 1</a:t>
             </a:r>
           </a:p>
         </p:txBody>
@@ -3797,8 +3922,8 @@
         </p:nvSpPr>
         <p:spPr>
           <a:xfrm>
-            <a:off x="731520" y="6309360"/>
-            <a:ext cx="10789920" cy="365760"/>
+            <a:off x="731520" y="6327648"/>
+            <a:ext cx="10789920" cy="320040"/>
           </a:xfrm>
           <a:prstGeom prst="rect">
             <a:avLst/>
@@ -3820,6 +3945,41 @@
             </a:pPr>
             <a:r>
               <a:t>PCCST501 Computer Networks | KTU 2024 Scheme | Prof. Anju Markose | Assistant Professor, Dept. of CSE | VJCET</a:t>
+            </a:r>
+          </a:p>
+        </p:txBody>
+      </p:sp>
+      <p:sp>
+        <p:nvSpPr>
+          <p:cNvPr id="10" name="TextBox 9"/>
+          <p:cNvSpPr txBox="1"/>
+          <p:nvPr/>
+        </p:nvSpPr>
+        <p:spPr>
+          <a:xfrm>
+            <a:off x="6858000" y="6327648"/>
+            <a:ext cx="4572000" cy="320040"/>
+          </a:xfrm>
+          <a:prstGeom prst="rect">
+            <a:avLst/>
+          </a:prstGeom>
+          <a:noFill/>
+        </p:spPr>
+        <p:txBody>
+          <a:bodyPr wrap="none">
+            <a:spAutoFit/>
+          </a:bodyPr>
+          <a:lstStyle/>
+          <a:p>
+            <a:pPr algn="r">
+              <a:defRPr sz="950">
+                <a:solidFill>
+                  <a:srgbClr val="64748B"/>
+                </a:solidFill>
+              </a:defRPr>
+            </a:pPr>
+            <a:r>
+              <a:t>Dept. of CSE, VJCET</a:t>
             </a:r>
           </a:p>
         </p:txBody>
@@ -3951,14 +4111,14 @@
           <a:lstStyle/>
           <a:p>
             <a:pPr>
-              <a:defRPr b="1" sz="2300">
+              <a:defRPr b="1" sz="2200">
                 <a:solidFill>
                   <a:srgbClr val="F8FAFC"/>
                 </a:solidFill>
               </a:defRPr>
             </a:pPr>
             <a:r>
-              <a:t>3.2.2 Error Correction: Hamming Code (7,4)</a:t>
+              <a:t>3.2.2 Worked KTU Numerical: CRC Modulo-2 Polynomial Division</a:t>
             </a:r>
           </a:p>
         </p:txBody>
@@ -3993,174 +4153,31 @@
               </a:defRPr>
             </a:pPr>
             <a:r>
-              <a:t>M3.2 HAMMING CODE</a:t>
-            </a:r>
-          </a:p>
-        </p:txBody>
-      </p:sp>
-      <p:sp>
-        <p:nvSpPr>
-          <p:cNvPr id="6" name="TextBox 5"/>
-          <p:cNvSpPr txBox="1"/>
-          <p:nvPr/>
-        </p:nvSpPr>
-        <p:spPr>
-          <a:xfrm>
-            <a:off x="731520" y="1280160"/>
-            <a:ext cx="6858000" cy="4937760"/>
-          </a:xfrm>
-          <a:prstGeom prst="rect">
-            <a:avLst/>
-          </a:prstGeom>
-          <a:noFill/>
-        </p:spPr>
-        <p:txBody>
-          <a:bodyPr wrap="square">
-            <a:spAutoFit/>
-          </a:bodyPr>
-          <a:lstStyle/>
-          <a:p>
-            <a:pPr>
-              <a:spcAft>
-                <a:spcPts val="200"/>
-              </a:spcAft>
-              <a:defRPr b="1" sz="1500">
-                <a:solidFill>
-                  <a:srgbClr val="0F1E4A"/>
-                </a:solidFill>
-              </a:defRPr>
-            </a:pPr>
-            <a:r>
-              <a:t>• Hamming Distance ($d_{min}$)</a:t>
-            </a:r>
-          </a:p>
-          <a:p>
-            <a:pPr>
-              <a:spcAft>
-                <a:spcPts val="800"/>
-              </a:spcAft>
-              <a:defRPr sz="1300">
-                <a:solidFill>
-                  <a:srgbClr val="1E293B"/>
-                </a:solidFill>
-              </a:defRPr>
-            </a:pPr>
-            <a:r>
-              <a:t>   To detect $e$ errors, minimum Hamming distance must be $d_{min} \ge e + 1$. To correct $t$ errors, $d_{min} \ge 2t + 1$.</a:t>
-            </a:r>
-          </a:p>
-          <a:p>
-            <a:pPr>
-              <a:spcAft>
-                <a:spcPts val="200"/>
-              </a:spcAft>
-              <a:defRPr b="1" sz="1500">
-                <a:solidFill>
-                  <a:srgbClr val="0F1E4A"/>
-                </a:solidFill>
-              </a:defRPr>
-            </a:pPr>
-            <a:r>
-              <a:t>• Hamming (7,4) Code Structure</a:t>
-            </a:r>
-          </a:p>
-          <a:p>
-            <a:pPr>
-              <a:spcAft>
-                <a:spcPts val="800"/>
-              </a:spcAft>
-              <a:defRPr sz="1300">
-                <a:solidFill>
-                  <a:srgbClr val="1E293B"/>
-                </a:solidFill>
-              </a:defRPr>
-            </a:pPr>
-            <a:r>
-              <a:t>   Transmits 4 data bits ($d_1, d_2, d_3, d_4$) with 3 parity check bits ($p_1, p_2, p_3$) at power-of-2 positions ($1, 2, 4$). Total codeword = 7 bits.</a:t>
-            </a:r>
-          </a:p>
-          <a:p>
-            <a:pPr>
-              <a:spcAft>
-                <a:spcPts val="200"/>
-              </a:spcAft>
-              <a:defRPr b="1" sz="1500">
-                <a:solidFill>
-                  <a:srgbClr val="0F1E4A"/>
-                </a:solidFill>
-              </a:defRPr>
-            </a:pPr>
-            <a:r>
-              <a:t>• Parity Bit Assignment (Even Parity)</a:t>
-            </a:r>
-          </a:p>
-          <a:p>
-            <a:pPr>
-              <a:spcAft>
-                <a:spcPts val="800"/>
-              </a:spcAft>
-              <a:defRPr sz="1300">
-                <a:solidFill>
-                  <a:srgbClr val="1E293B"/>
-                </a:solidFill>
-              </a:defRPr>
-            </a:pPr>
-            <a:r>
-              <a:t>   $p_1$ checks bits (1, 3, 5, 7); $p_2$ checks bits (2, 3, 6, 7); $p_4$ checks bits (4, 5, 6, 7).</a:t>
-            </a:r>
-          </a:p>
-          <a:p>
-            <a:pPr>
-              <a:spcAft>
-                <a:spcPts val="200"/>
-              </a:spcAft>
-              <a:defRPr b="1" sz="1500">
-                <a:solidFill>
-                  <a:srgbClr val="0F1E4A"/>
-                </a:solidFill>
-              </a:defRPr>
-            </a:pPr>
-            <a:r>
-              <a:t>• Syndrome Word Calculation</a:t>
-            </a:r>
-          </a:p>
-          <a:p>
-            <a:pPr>
-              <a:spcAft>
-                <a:spcPts val="800"/>
-              </a:spcAft>
-              <a:defRPr sz="1300">
-                <a:solidFill>
-                  <a:srgbClr val="1E293B"/>
-                </a:solidFill>
-              </a:defRPr>
-            </a:pPr>
-            <a:r>
-              <a:t>   Receiver calculates syndrome bits $s_3 s_2 s_1$. If syndrome is `000`, no error occurred. If syndrome equals binary integer $k$ ($1 \le k \le 7$), bit position $k$ is inverted and corrected!</a:t>
-            </a:r>
-          </a:p>
-        </p:txBody>
-      </p:sp>
-      <p:sp>
-        <p:nvSpPr>
-          <p:cNvPr id="7" name="Rounded Rectangle 6"/>
+              <a:t>M3.2 CRC WORKED PROBLEM</a:t>
+            </a:r>
+          </a:p>
+        </p:txBody>
+      </p:sp>
+      <p:sp>
+        <p:nvSpPr>
+          <p:cNvPr id="6" name="Rounded Rectangle 5"/>
           <p:cNvSpPr/>
           <p:nvPr/>
         </p:nvSpPr>
         <p:spPr>
           <a:xfrm>
-            <a:off x="7955279" y="1280160"/>
-            <a:ext cx="3566160" cy="4846320"/>
+            <a:off x="731520" y="1234440"/>
+            <a:ext cx="5486400" cy="4892040"/>
           </a:xfrm>
           <a:prstGeom prst="roundRect">
             <a:avLst/>
           </a:prstGeom>
           <a:solidFill>
-            <a:srgbClr val="F1F5F9"/>
+            <a:srgbClr val="F8FAFC"/>
           </a:solidFill>
           <a:ln w="19050">
             <a:solidFill>
-              <a:srgbClr val="0E7490"/>
+              <a:srgbClr val="0F1E4A"/>
             </a:solidFill>
           </a:ln>
         </p:spPr>
@@ -4188,14 +4205,14 @@
       </p:sp>
       <p:sp>
         <p:nvSpPr>
-          <p:cNvPr id="8" name="TextBox 7"/>
+          <p:cNvPr id="7" name="TextBox 6"/>
           <p:cNvSpPr txBox="1"/>
           <p:nvPr/>
         </p:nvSpPr>
         <p:spPr>
           <a:xfrm>
-            <a:off x="8138160" y="1417320"/>
-            <a:ext cx="3200400" cy="4572000"/>
+            <a:off x="914400" y="1371600"/>
+            <a:ext cx="5120640" cy="4572000"/>
           </a:xfrm>
           <a:prstGeom prst="rect">
             <a:avLst/>
@@ -4210,77 +4227,152 @@
           <a:p>
             <a:pPr>
               <a:spcAft>
-                <a:spcPts val="1000"/>
-              </a:spcAft>
-              <a:defRPr b="1" sz="1500">
+                <a:spcPts val="800"/>
+              </a:spcAft>
+              <a:defRPr b="1" sz="1450">
+                <a:solidFill>
+                  <a:srgbClr val="0F1E4A"/>
+                </a:solidFill>
+              </a:defRPr>
+            </a:pPr>
+            <a:r>
+              <a:t>📌 KTU Numerical Problem Statement</a:t>
+            </a:r>
+          </a:p>
+          <a:p>
+            <a:pPr>
+              <a:spcAft>
+                <a:spcPts val="1400"/>
+              </a:spcAft>
+              <a:defRPr sz="1250">
+                <a:solidFill>
+                  <a:srgbClr val="0F172A"/>
+                </a:solidFill>
+              </a:defRPr>
+            </a:pPr>
+            <a:r>
+              <a:t>A data bit stream D = 10100100 is to be transmitted using CRC generator polynomial G(x) = x^4 + x^2 + 1 (binary generator G = 10101). (a) Determine the 4-bit CRC Checksum (Frame Check Sequence FCS), (b) What codeword is transmitted? (c) Show that receiver detects zero remainder in the absence of bit errors.</a:t>
+            </a:r>
+          </a:p>
+          <a:p>
+            <a:pPr>
+              <a:spcAft>
+                <a:spcPts val="600"/>
+              </a:spcAft>
+              <a:defRPr b="1" sz="1350">
                 <a:solidFill>
                   <a:srgbClr val="0E7490"/>
                 </a:solidFill>
               </a:defRPr>
             </a:pPr>
             <a:r>
-              <a:t>Hamming Key Rules</a:t>
-            </a:r>
-          </a:p>
-          <a:p>
-            <a:pPr>
-              <a:spcAft>
-                <a:spcPts val="600"/>
+              <a:t>📐 Governing Formulas &amp; Principles:</a:t>
+            </a:r>
+          </a:p>
+          <a:p>
+            <a:pPr>
+              <a:spcAft>
+                <a:spcPts val="400"/>
               </a:spcAft>
               <a:defRPr sz="1200">
                 <a:solidFill>
-                  <a:srgbClr val="1E293B"/>
-                </a:solidFill>
-              </a:defRPr>
-            </a:pPr>
-            <a:r>
-              <a:t>→ Parity bit positions: 1, 2, 4, 8...</a:t>
-            </a:r>
-          </a:p>
-          <a:p>
-            <a:pPr>
-              <a:spcAft>
-                <a:spcPts val="600"/>
+                  <a:srgbClr val="0F172A"/>
+                </a:solidFill>
+              </a:defRPr>
+            </a:pPr>
+            <a:r>
+              <a:t>• Generator G(x) = x^4 + x^2 + 1 -&gt; Degree r = 4 -&gt; Generator bit string G = 10101 (5 bits).</a:t>
+            </a:r>
+          </a:p>
+          <a:p>
+            <a:pPr>
+              <a:spcAft>
+                <a:spcPts val="400"/>
               </a:spcAft>
               <a:defRPr sz="1200">
                 <a:solidFill>
-                  <a:srgbClr val="1E293B"/>
-                </a:solidFill>
-              </a:defRPr>
-            </a:pPr>
-            <a:r>
-              <a:t>→ Parity bits formula: 2^p &gt;= m + p + 1</a:t>
-            </a:r>
-          </a:p>
-          <a:p>
-            <a:pPr>
-              <a:spcAft>
-                <a:spcPts val="600"/>
+                  <a:srgbClr val="0F172A"/>
+                </a:solidFill>
+              </a:defRPr>
+            </a:pPr>
+            <a:r>
+              <a:t>• Step 1: Append r = 4 zeros to data D: D' = 10100100 0000 (12 bits).</a:t>
+            </a:r>
+          </a:p>
+          <a:p>
+            <a:pPr>
+              <a:spcAft>
+                <a:spcPts val="400"/>
               </a:spcAft>
               <a:defRPr sz="1200">
                 <a:solidFill>
-                  <a:srgbClr val="1E293B"/>
-                </a:solidFill>
-              </a:defRPr>
-            </a:pPr>
-            <a:r>
-              <a:t>→ Syndrome indicates exact bit error position</a:t>
-            </a:r>
-          </a:p>
-          <a:p>
-            <a:pPr>
-              <a:spcAft>
-                <a:spcPts val="600"/>
+                  <a:srgbClr val="0F172A"/>
+                </a:solidFill>
+              </a:defRPr>
+            </a:pPr>
+            <a:r>
+              <a:t>• Step 2: Perform Modulo-2 binary division (XOR operations) of D' by G.</a:t>
+            </a:r>
+          </a:p>
+          <a:p>
+            <a:pPr>
+              <a:spcAft>
+                <a:spcPts val="400"/>
               </a:spcAft>
               <a:defRPr sz="1200">
                 <a:solidFill>
-                  <a:srgbClr val="1E293B"/>
-                </a:solidFill>
-              </a:defRPr>
-            </a:pPr>
-            <a:r>
-              <a:t>→ Detects 2-bit, corrects 1-bit errors</a:t>
-            </a:r>
+                  <a:srgbClr val="0F172A"/>
+                </a:solidFill>
+              </a:defRPr>
+            </a:pPr>
+            <a:r>
+              <a:t>• Step 3: Remainder of division is the 4-bit CRC Checksum R.</a:t>
+            </a:r>
+          </a:p>
+        </p:txBody>
+      </p:sp>
+      <p:sp>
+        <p:nvSpPr>
+          <p:cNvPr id="8" name="Rounded Rectangle 7"/>
+          <p:cNvSpPr/>
+          <p:nvPr/>
+        </p:nvSpPr>
+        <p:spPr>
+          <a:xfrm>
+            <a:off x="6492240" y="1234440"/>
+            <a:ext cx="5029200" cy="4892040"/>
+          </a:xfrm>
+          <a:prstGeom prst="roundRect">
+            <a:avLst/>
+          </a:prstGeom>
+          <a:solidFill>
+            <a:srgbClr val="ECFDF5"/>
+          </a:solidFill>
+          <a:ln w="19050">
+            <a:solidFill>
+              <a:srgbClr val="10B981"/>
+            </a:solidFill>
+          </a:ln>
+        </p:spPr>
+        <p:style>
+          <a:lnRef idx="1">
+            <a:schemeClr val="accent1"/>
+          </a:lnRef>
+          <a:fillRef idx="3">
+            <a:schemeClr val="accent1"/>
+          </a:fillRef>
+          <a:effectRef idx="2">
+            <a:schemeClr val="accent1"/>
+          </a:effectRef>
+          <a:fontRef idx="minor">
+            <a:schemeClr val="lt1"/>
+          </a:fontRef>
+        </p:style>
+        <p:txBody>
+          <a:bodyPr rtlCol="0" anchor="ctr"/>
+          <a:lstStyle/>
+          <a:p>
+            <a:pPr algn="ctr"/>
           </a:p>
         </p:txBody>
       </p:sp>
@@ -4292,8 +4384,8 @@
         </p:nvSpPr>
         <p:spPr>
           <a:xfrm>
-            <a:off x="731520" y="6309360"/>
-            <a:ext cx="10789920" cy="365760"/>
+            <a:off x="6675120" y="1371600"/>
+            <a:ext cx="4663440" cy="4572000"/>
           </a:xfrm>
           <a:prstGeom prst="rect">
             <a:avLst/>
@@ -4301,6 +4393,146 @@
           <a:noFill/>
         </p:spPr>
         <p:txBody>
+          <a:bodyPr wrap="square">
+            <a:spAutoFit/>
+          </a:bodyPr>
+          <a:lstStyle/>
+          <a:p>
+            <a:pPr>
+              <a:spcAft>
+                <a:spcPts val="800"/>
+              </a:spcAft>
+              <a:defRPr b="1" sz="1450">
+                <a:solidFill>
+                  <a:srgbClr val="047857"/>
+                </a:solidFill>
+              </a:defRPr>
+            </a:pPr>
+            <a:r>
+              <a:t>📝 Step-by-Step Derivation &amp; Solution</a:t>
+            </a:r>
+          </a:p>
+          <a:p>
+            <a:pPr>
+              <a:spcAft>
+                <a:spcPts val="500"/>
+              </a:spcAft>
+              <a:defRPr sz="1200">
+                <a:solidFill>
+                  <a:srgbClr val="0F172A"/>
+                </a:solidFill>
+              </a:defRPr>
+            </a:pPr>
+            <a:r>
+              <a:t>Step 1: Dividend: 101001000000 | Divisor: 10101</a:t>
+            </a:r>
+          </a:p>
+          <a:p>
+            <a:pPr>
+              <a:spcAft>
+                <a:spcPts val="500"/>
+              </a:spcAft>
+              <a:defRPr sz="1200">
+                <a:solidFill>
+                  <a:srgbClr val="0F172A"/>
+                </a:solidFill>
+              </a:defRPr>
+            </a:pPr>
+            <a:r>
+              <a:t>Step 2: 10100 XOR 10101 -&gt; Remainder 00001; bring down bits -&gt; 0001100...</a:t>
+            </a:r>
+          </a:p>
+          <a:p>
+            <a:pPr>
+              <a:spcAft>
+                <a:spcPts val="500"/>
+              </a:spcAft>
+              <a:defRPr sz="1200">
+                <a:solidFill>
+                  <a:srgbClr val="0F172A"/>
+                </a:solidFill>
+              </a:defRPr>
+            </a:pPr>
+            <a:r>
+              <a:t>Step 3: Continuing Modulo-2 XOR division yields 4-bit Remainder R = 1100.</a:t>
+            </a:r>
+          </a:p>
+          <a:p>
+            <a:pPr>
+              <a:spcAft>
+                <a:spcPts val="500"/>
+              </a:spcAft>
+              <a:defRPr sz="1200">
+                <a:solidFill>
+                  <a:srgbClr val="0F172A"/>
+                </a:solidFill>
+              </a:defRPr>
+            </a:pPr>
+            <a:r>
+              <a:t>Step 4: Transmitted Codeword T = Data + CRC = 10100100 1100 (12 bits).</a:t>
+            </a:r>
+          </a:p>
+          <a:p>
+            <a:pPr>
+              <a:spcAft>
+                <a:spcPts val="500"/>
+              </a:spcAft>
+              <a:defRPr sz="1200">
+                <a:solidFill>
+                  <a:srgbClr val="0F172A"/>
+                </a:solidFill>
+              </a:defRPr>
+            </a:pPr>
+            <a:r>
+              <a:t>Step 5: Receiver Divides T (101001001100) by G (10101) -&gt; Remainder = 0000 (Valid / No errors!).</a:t>
+            </a:r>
+          </a:p>
+          <a:p>
+            <a:pPr>
+              <a:spcAft>
+                <a:spcPts val="800"/>
+              </a:spcAft>
+              <a:defRPr b="1" sz="1300">
+                <a:solidFill>
+                  <a:srgbClr val="047857"/>
+                </a:solidFill>
+              </a:defRPr>
+            </a:pPr>
+            <a:r>
+              <a:t>✅ FINAL ANSWER: CRC Checksum = 1100 | Transmitted Codeword = 101001001100</a:t>
+            </a:r>
+          </a:p>
+          <a:p>
+            <a:pPr>
+              <a:defRPr sz="1100">
+                <a:solidFill>
+                  <a:srgbClr val="64748B"/>
+                </a:solidFill>
+              </a:defRPr>
+            </a:pPr>
+            <a:r>
+              <a:t>💡 Exam Tip: Modulo-2 addition and subtraction are both identical to bitwise XOR with zero carries/borrows.</a:t>
+            </a:r>
+          </a:p>
+        </p:txBody>
+      </p:sp>
+      <p:sp>
+        <p:nvSpPr>
+          <p:cNvPr id="10" name="TextBox 9"/>
+          <p:cNvSpPr txBox="1"/>
+          <p:nvPr/>
+        </p:nvSpPr>
+        <p:spPr>
+          <a:xfrm>
+            <a:off x="731520" y="6327648"/>
+            <a:ext cx="10789920" cy="320040"/>
+          </a:xfrm>
+          <a:prstGeom prst="rect">
+            <a:avLst/>
+          </a:prstGeom>
+          <a:noFill/>
+        </p:spPr>
+        <p:txBody>
           <a:bodyPr wrap="none">
             <a:spAutoFit/>
           </a:bodyPr>
@@ -4315,6 +4547,41 @@
             </a:pPr>
             <a:r>
               <a:t>PCCST501 Computer Networks | KTU 2024 Scheme | Prof. Anju Markose | Assistant Professor, Dept. of CSE | VJCET</a:t>
+            </a:r>
+          </a:p>
+        </p:txBody>
+      </p:sp>
+      <p:sp>
+        <p:nvSpPr>
+          <p:cNvPr id="11" name="TextBox 10"/>
+          <p:cNvSpPr txBox="1"/>
+          <p:nvPr/>
+        </p:nvSpPr>
+        <p:spPr>
+          <a:xfrm>
+            <a:off x="6858000" y="6327648"/>
+            <a:ext cx="4572000" cy="320040"/>
+          </a:xfrm>
+          <a:prstGeom prst="rect">
+            <a:avLst/>
+          </a:prstGeom>
+          <a:noFill/>
+        </p:spPr>
+        <p:txBody>
+          <a:bodyPr wrap="none">
+            <a:spAutoFit/>
+          </a:bodyPr>
+          <a:lstStyle/>
+          <a:p>
+            <a:pPr algn="r">
+              <a:defRPr sz="950">
+                <a:solidFill>
+                  <a:srgbClr val="64748B"/>
+                </a:solidFill>
+              </a:defRPr>
+            </a:pPr>
+            <a:r>
+              <a:t>Dept. of CSE, VJCET</a:t>
             </a:r>
           </a:p>
         </p:txBody>
@@ -4446,14 +4713,14 @@
           <a:lstStyle/>
           <a:p>
             <a:pPr>
-              <a:defRPr b="1" sz="2300">
+              <a:defRPr b="1" sz="2200">
                 <a:solidFill>
                   <a:srgbClr val="F8FAFC"/>
                 </a:solidFill>
               </a:defRPr>
             </a:pPr>
             <a:r>
-              <a:t>3.2.3 Sliding Window Flow Control: Stop-and-Wait vs GBN vs SR</a:t>
+              <a:t>3.2.3 Worked KTU Numerical: Hamming (7,4) Single-Bit Error Correction</a:t>
             </a:r>
           </a:p>
         </p:txBody>
@@ -4488,7 +4755,7 @@
               </a:defRPr>
             </a:pPr>
             <a:r>
-              <a:t>M3.2 ARQ PROTOCOLS</a:t>
+              <a:t>M3.2 HAMMING CODE WORKED</a:t>
             </a:r>
           </a:p>
         </p:txBody>
@@ -4501,18 +4768,18 @@
         </p:nvSpPr>
         <p:spPr>
           <a:xfrm>
-            <a:off x="731520" y="1280160"/>
-            <a:ext cx="5212080" cy="4846320"/>
+            <a:off x="731520" y="1234440"/>
+            <a:ext cx="5486400" cy="4892040"/>
           </a:xfrm>
           <a:prstGeom prst="roundRect">
             <a:avLst/>
           </a:prstGeom>
           <a:solidFill>
-            <a:srgbClr val="F1F5F9"/>
+            <a:srgbClr val="F8FAFC"/>
           </a:solidFill>
           <a:ln w="19050">
             <a:solidFill>
-              <a:srgbClr val="0E7490"/>
+              <a:srgbClr val="0F1E4A"/>
             </a:solidFill>
           </a:ln>
         </p:spPr>
@@ -4546,8 +4813,8 @@
         </p:nvSpPr>
         <p:spPr>
           <a:xfrm>
-            <a:off x="914400" y="1417320"/>
-            <a:ext cx="4846320" cy="4572000"/>
+            <a:off x="914400" y="1371600"/>
+            <a:ext cx="5120640" cy="4572000"/>
           </a:xfrm>
           <a:prstGeom prst="rect">
             <a:avLst/>
@@ -4562,16 +4829,31 @@
           <a:p>
             <a:pPr>
               <a:spcAft>
-                <a:spcPts val="1200"/>
-              </a:spcAft>
-              <a:defRPr b="1" sz="1600">
+                <a:spcPts val="800"/>
+              </a:spcAft>
+              <a:defRPr b="1" sz="1450">
                 <a:solidFill>
                   <a:srgbClr val="0F1E4A"/>
                 </a:solidFill>
               </a:defRPr>
             </a:pPr>
             <a:r>
-              <a:t>Go-Back-N ARQ (GBN)</a:t>
+              <a:t>📌 KTU Numerical Problem Statement</a:t>
+            </a:r>
+          </a:p>
+          <a:p>
+            <a:pPr>
+              <a:spcAft>
+                <a:spcPts val="1400"/>
+              </a:spcAft>
+              <a:defRPr sz="1250">
+                <a:solidFill>
+                  <a:srgbClr val="0F172A"/>
+                </a:solidFill>
+              </a:defRPr>
+            </a:pPr>
+            <a:r>
+              <a:t>A 4-bit dataword D = 1011 (d4=1, d3=0, d2=1, d1=1) is encoded using Hamming (7,4) code with parity bits at positions 1, 2, 4. (a) Generate 7-bit codeword. (b) If received word is R = 1011011, calculate syndrome bits (s3, s2, s1) and locate the erroneous bit position.</a:t>
             </a:r>
           </a:p>
           <a:p>
@@ -4579,74 +4861,89 @@
               <a:spcAft>
                 <a:spcPts val="600"/>
               </a:spcAft>
-              <a:defRPr sz="1250">
-                <a:solidFill>
-                  <a:srgbClr val="1E293B"/>
-                </a:solidFill>
-              </a:defRPr>
-            </a:pPr>
-            <a:r>
-              <a:t>• Sender Window: Size $N &gt; 1$; unacked frames inflight</a:t>
-            </a:r>
-          </a:p>
-          <a:p>
-            <a:pPr>
-              <a:spcAft>
-                <a:spcPts val="600"/>
-              </a:spcAft>
-              <a:defRPr sz="1250">
-                <a:solidFill>
-                  <a:srgbClr val="1E293B"/>
-                </a:solidFill>
-              </a:defRPr>
-            </a:pPr>
-            <a:r>
-              <a:t>• Receiver Window: Size = 1; accepts frames strictly in-order</a:t>
-            </a:r>
-          </a:p>
-          <a:p>
-            <a:pPr>
-              <a:spcAft>
-                <a:spcPts val="600"/>
-              </a:spcAft>
-              <a:defRPr sz="1250">
-                <a:solidFill>
-                  <a:srgbClr val="1E293B"/>
-                </a:solidFill>
-              </a:defRPr>
-            </a:pPr>
-            <a:r>
-              <a:t>• On Out-of-Order Frame: Discards frame and re-sends ACK for last in-order frame</a:t>
-            </a:r>
-          </a:p>
-          <a:p>
-            <a:pPr>
-              <a:spcAft>
-                <a:spcPts val="600"/>
-              </a:spcAft>
-              <a:defRPr sz="1250">
-                <a:solidFill>
-                  <a:srgbClr val="1E293B"/>
-                </a:solidFill>
-              </a:defRPr>
-            </a:pPr>
-            <a:r>
-              <a:t>• On Timeout: Retransmits ALL $N$ unacknowledged frames</a:t>
-            </a:r>
-          </a:p>
-          <a:p>
-            <a:pPr>
-              <a:spcAft>
-                <a:spcPts val="600"/>
-              </a:spcAft>
-              <a:defRPr sz="1250">
-                <a:solidFill>
-                  <a:srgbClr val="1E293B"/>
-                </a:solidFill>
-              </a:defRPr>
-            </a:pPr>
-            <a:r>
-              <a:t>• Sequence Numbers: Requires sequence numbers $\ge N + 1$</a:t>
+              <a:defRPr b="1" sz="1350">
+                <a:solidFill>
+                  <a:srgbClr val="0E7490"/>
+                </a:solidFill>
+              </a:defRPr>
+            </a:pPr>
+            <a:r>
+              <a:t>📐 Governing Formulas &amp; Principles:</a:t>
+            </a:r>
+          </a:p>
+          <a:p>
+            <a:pPr>
+              <a:spcAft>
+                <a:spcPts val="400"/>
+              </a:spcAft>
+              <a:defRPr sz="1200">
+                <a:solidFill>
+                  <a:srgbClr val="0F172A"/>
+                </a:solidFill>
+              </a:defRPr>
+            </a:pPr>
+            <a:r>
+              <a:t>• Bit positions 1 to 7: p1 (pos 1), p2 (pos 2), d1 (pos 3), p4 (pos 4), d2 (pos 5), d3 (pos 6), d4 (pos 7).</a:t>
+            </a:r>
+          </a:p>
+          <a:p>
+            <a:pPr>
+              <a:spcAft>
+                <a:spcPts val="400"/>
+              </a:spcAft>
+              <a:defRPr sz="1200">
+                <a:solidFill>
+                  <a:srgbClr val="0F172A"/>
+                </a:solidFill>
+              </a:defRPr>
+            </a:pPr>
+            <a:r>
+              <a:t>• p1 checks positions with bit 1 set (1, 3, 5, 7): p1 = d1 XOR d2 XOR d4.</a:t>
+            </a:r>
+          </a:p>
+          <a:p>
+            <a:pPr>
+              <a:spcAft>
+                <a:spcPts val="400"/>
+              </a:spcAft>
+              <a:defRPr sz="1200">
+                <a:solidFill>
+                  <a:srgbClr val="0F172A"/>
+                </a:solidFill>
+              </a:defRPr>
+            </a:pPr>
+            <a:r>
+              <a:t>• p2 checks positions with bit 2 set (2, 3, 6, 7): p2 = d1 XOR d3 XOR d4.</a:t>
+            </a:r>
+          </a:p>
+          <a:p>
+            <a:pPr>
+              <a:spcAft>
+                <a:spcPts val="400"/>
+              </a:spcAft>
+              <a:defRPr sz="1200">
+                <a:solidFill>
+                  <a:srgbClr val="0F172A"/>
+                </a:solidFill>
+              </a:defRPr>
+            </a:pPr>
+            <a:r>
+              <a:t>• p4 checks positions with bit 4 set (4, 5, 6, 7): p4 = d2 XOR d3 XOR d4.</a:t>
+            </a:r>
+          </a:p>
+          <a:p>
+            <a:pPr>
+              <a:spcAft>
+                <a:spcPts val="400"/>
+              </a:spcAft>
+              <a:defRPr sz="1200">
+                <a:solidFill>
+                  <a:srgbClr val="0F172A"/>
+                </a:solidFill>
+              </a:defRPr>
+            </a:pPr>
+            <a:r>
+              <a:t>• Syndrome S = (s4 s2 s1) indicates decimal error bit position (0 = no error).</a:t>
             </a:r>
           </a:p>
         </p:txBody>
@@ -4659,8 +4956,595 @@
         </p:nvSpPr>
         <p:spPr>
           <a:xfrm>
-            <a:off x="6309360" y="1280160"/>
-            <a:ext cx="5212080" cy="4846320"/>
+            <a:off x="6492240" y="1234440"/>
+            <a:ext cx="5029200" cy="4892040"/>
+          </a:xfrm>
+          <a:prstGeom prst="roundRect">
+            <a:avLst/>
+          </a:prstGeom>
+          <a:solidFill>
+            <a:srgbClr val="ECFDF5"/>
+          </a:solidFill>
+          <a:ln w="19050">
+            <a:solidFill>
+              <a:srgbClr val="10B981"/>
+            </a:solidFill>
+          </a:ln>
+        </p:spPr>
+        <p:style>
+          <a:lnRef idx="1">
+            <a:schemeClr val="accent1"/>
+          </a:lnRef>
+          <a:fillRef idx="3">
+            <a:schemeClr val="accent1"/>
+          </a:fillRef>
+          <a:effectRef idx="2">
+            <a:schemeClr val="accent1"/>
+          </a:effectRef>
+          <a:fontRef idx="minor">
+            <a:schemeClr val="lt1"/>
+          </a:fontRef>
+        </p:style>
+        <p:txBody>
+          <a:bodyPr rtlCol="0" anchor="ctr"/>
+          <a:lstStyle/>
+          <a:p>
+            <a:pPr algn="ctr"/>
+          </a:p>
+        </p:txBody>
+      </p:sp>
+      <p:sp>
+        <p:nvSpPr>
+          <p:cNvPr id="9" name="TextBox 8"/>
+          <p:cNvSpPr txBox="1"/>
+          <p:nvPr/>
+        </p:nvSpPr>
+        <p:spPr>
+          <a:xfrm>
+            <a:off x="6675120" y="1371600"/>
+            <a:ext cx="4663440" cy="4572000"/>
+          </a:xfrm>
+          <a:prstGeom prst="rect">
+            <a:avLst/>
+          </a:prstGeom>
+          <a:noFill/>
+        </p:spPr>
+        <p:txBody>
+          <a:bodyPr wrap="square">
+            <a:spAutoFit/>
+          </a:bodyPr>
+          <a:lstStyle/>
+          <a:p>
+            <a:pPr>
+              <a:spcAft>
+                <a:spcPts val="800"/>
+              </a:spcAft>
+              <a:defRPr b="1" sz="1450">
+                <a:solidFill>
+                  <a:srgbClr val="047857"/>
+                </a:solidFill>
+              </a:defRPr>
+            </a:pPr>
+            <a:r>
+              <a:t>📝 Step-by-Step Derivation &amp; Solution</a:t>
+            </a:r>
+          </a:p>
+          <a:p>
+            <a:pPr>
+              <a:spcAft>
+                <a:spcPts val="500"/>
+              </a:spcAft>
+              <a:defRPr sz="1200">
+                <a:solidFill>
+                  <a:srgbClr val="0F172A"/>
+                </a:solidFill>
+              </a:defRPr>
+            </a:pPr>
+            <a:r>
+              <a:t>Step 1: p1 = 1 XOR 1 XOR 1 = 1 | p2 = 1 XOR 0 XOR 1 = 0 | p4 = 1 XOR 0 XOR 1 = 0</a:t>
+            </a:r>
+          </a:p>
+          <a:p>
+            <a:pPr>
+              <a:spcAft>
+                <a:spcPts val="500"/>
+              </a:spcAft>
+              <a:defRPr sz="1200">
+                <a:solidFill>
+                  <a:srgbClr val="0F172A"/>
+                </a:solidFill>
+              </a:defRPr>
+            </a:pPr>
+            <a:r>
+              <a:t>Step 2: Generated Codeword: (p1, p2, d1, p4, d2, d3, d4) = (1, 0, 1, 0, 1, 0, 1) -&gt; 1010101</a:t>
+            </a:r>
+          </a:p>
+          <a:p>
+            <a:pPr>
+              <a:spcAft>
+                <a:spcPts val="500"/>
+              </a:spcAft>
+              <a:defRPr sz="1200">
+                <a:solidFill>
+                  <a:srgbClr val="0F172A"/>
+                </a:solidFill>
+              </a:defRPr>
+            </a:pPr>
+            <a:r>
+              <a:t>Step 3: Received Word R = (r1..r7) = (1, 1, 0, 1, 1, 0, 1) (bit 2 corrupted!)</a:t>
+            </a:r>
+          </a:p>
+          <a:p>
+            <a:pPr>
+              <a:spcAft>
+                <a:spcPts val="500"/>
+              </a:spcAft>
+              <a:defRPr sz="1200">
+                <a:solidFill>
+                  <a:srgbClr val="0F172A"/>
+                </a:solidFill>
+              </a:defRPr>
+            </a:pPr>
+            <a:r>
+              <a:t>Step 4: s1 = r1 XOR r3 XOR r5 XOR r7 = 1 XOR 0 XOR 1 XOR 1 = 1</a:t>
+            </a:r>
+          </a:p>
+          <a:p>
+            <a:pPr>
+              <a:spcAft>
+                <a:spcPts val="500"/>
+              </a:spcAft>
+              <a:defRPr sz="1200">
+                <a:solidFill>
+                  <a:srgbClr val="0F172A"/>
+                </a:solidFill>
+              </a:defRPr>
+            </a:pPr>
+            <a:r>
+              <a:t>Step 5: s2 = r2 XOR r3 XOR r6 XOR r7 = 1 XOR 0 XOR 0 XOR 1 = 0</a:t>
+            </a:r>
+          </a:p>
+          <a:p>
+            <a:pPr>
+              <a:spcAft>
+                <a:spcPts val="500"/>
+              </a:spcAft>
+              <a:defRPr sz="1200">
+                <a:solidFill>
+                  <a:srgbClr val="0F172A"/>
+                </a:solidFill>
+              </a:defRPr>
+            </a:pPr>
+            <a:r>
+              <a:t>Step 6: s4 = r4 XOR r5 XOR r6 XOR r7 = 1 XOR 1 XOR 0 XOR 1 = 1 -&gt; Syndrome = 101_2 = Pos 5 (d2 corrupted!)</a:t>
+            </a:r>
+          </a:p>
+          <a:p>
+            <a:pPr>
+              <a:spcAft>
+                <a:spcPts val="800"/>
+              </a:spcAft>
+              <a:defRPr b="1" sz="1300">
+                <a:solidFill>
+                  <a:srgbClr val="047857"/>
+                </a:solidFill>
+              </a:defRPr>
+            </a:pPr>
+            <a:r>
+              <a:t>✅ FINAL ANSWER: Syndrome S = 101 (Binary 5) -&gt; Bit position 5 is inverted and corrected!</a:t>
+            </a:r>
+          </a:p>
+          <a:p>
+            <a:pPr>
+              <a:defRPr sz="1100">
+                <a:solidFill>
+                  <a:srgbClr val="64748B"/>
+                </a:solidFill>
+              </a:defRPr>
+            </a:pPr>
+            <a:r>
+              <a:t>💡 Exam Tip: Hamming (7,4) code can correct any single-bit error and detect any double-bit error.</a:t>
+            </a:r>
+          </a:p>
+        </p:txBody>
+      </p:sp>
+      <p:sp>
+        <p:nvSpPr>
+          <p:cNvPr id="10" name="TextBox 9"/>
+          <p:cNvSpPr txBox="1"/>
+          <p:nvPr/>
+        </p:nvSpPr>
+        <p:spPr>
+          <a:xfrm>
+            <a:off x="731520" y="6327648"/>
+            <a:ext cx="10789920" cy="320040"/>
+          </a:xfrm>
+          <a:prstGeom prst="rect">
+            <a:avLst/>
+          </a:prstGeom>
+          <a:noFill/>
+        </p:spPr>
+        <p:txBody>
+          <a:bodyPr wrap="none">
+            <a:spAutoFit/>
+          </a:bodyPr>
+          <a:lstStyle/>
+          <a:p>
+            <a:pPr>
+              <a:defRPr sz="950">
+                <a:solidFill>
+                  <a:srgbClr val="64748B"/>
+                </a:solidFill>
+              </a:defRPr>
+            </a:pPr>
+            <a:r>
+              <a:t>PCCST501 Computer Networks | KTU 2024 Scheme | Prof. Anju Markose | Assistant Professor, Dept. of CSE | VJCET</a:t>
+            </a:r>
+          </a:p>
+        </p:txBody>
+      </p:sp>
+      <p:sp>
+        <p:nvSpPr>
+          <p:cNvPr id="11" name="TextBox 10"/>
+          <p:cNvSpPr txBox="1"/>
+          <p:nvPr/>
+        </p:nvSpPr>
+        <p:spPr>
+          <a:xfrm>
+            <a:off x="6858000" y="6327648"/>
+            <a:ext cx="4572000" cy="320040"/>
+          </a:xfrm>
+          <a:prstGeom prst="rect">
+            <a:avLst/>
+          </a:prstGeom>
+          <a:noFill/>
+        </p:spPr>
+        <p:txBody>
+          <a:bodyPr wrap="none">
+            <a:spAutoFit/>
+          </a:bodyPr>
+          <a:lstStyle/>
+          <a:p>
+            <a:pPr algn="r">
+              <a:defRPr sz="950">
+                <a:solidFill>
+                  <a:srgbClr val="64748B"/>
+                </a:solidFill>
+              </a:defRPr>
+            </a:pPr>
+            <a:r>
+              <a:t>Dept. of CSE, VJCET</a:t>
+            </a:r>
+          </a:p>
+        </p:txBody>
+      </p:sp>
+    </p:spTree>
+  </p:cSld>
+  <p:clrMapOvr>
+    <a:masterClrMapping/>
+  </p:clrMapOvr>
+</p:sld>
+</file>
+
+<file path=ppt/slides/slide5.xml><?xml version="1.0" encoding="utf-8"?>
+<p:sld xmlns:a="http://schemas.openxmlformats.org/drawingml/2006/main" xmlns:p="http://schemas.openxmlformats.org/presentationml/2006/main" xmlns:r="http://schemas.openxmlformats.org/officeDocument/2006/relationships">
+  <p:cSld>
+    <p:spTree>
+      <p:nvGrpSpPr>
+        <p:cNvPr id="1" name=""/>
+        <p:cNvGrpSpPr/>
+        <p:nvPr/>
+      </p:nvGrpSpPr>
+      <p:grpSpPr/>
+      <p:sp>
+        <p:nvSpPr>
+          <p:cNvPr id="2" name="Rectangle 1"/>
+          <p:cNvSpPr/>
+          <p:nvPr/>
+        </p:nvSpPr>
+        <p:spPr>
+          <a:xfrm>
+            <a:off x="0" y="0"/>
+            <a:ext cx="12191695" cy="1005840"/>
+          </a:xfrm>
+          <a:prstGeom prst="rect">
+            <a:avLst/>
+          </a:prstGeom>
+          <a:solidFill>
+            <a:srgbClr val="0F1E4A"/>
+          </a:solidFill>
+          <a:ln>
+            <a:noFill/>
+          </a:ln>
+        </p:spPr>
+        <p:style>
+          <a:lnRef idx="1">
+            <a:schemeClr val="accent1"/>
+          </a:lnRef>
+          <a:fillRef idx="3">
+            <a:schemeClr val="accent1"/>
+          </a:fillRef>
+          <a:effectRef idx="2">
+            <a:schemeClr val="accent1"/>
+          </a:effectRef>
+          <a:fontRef idx="minor">
+            <a:schemeClr val="lt1"/>
+          </a:fontRef>
+        </p:style>
+        <p:txBody>
+          <a:bodyPr rtlCol="0" anchor="ctr"/>
+          <a:lstStyle/>
+          <a:p>
+            <a:pPr algn="ctr"/>
+          </a:p>
+        </p:txBody>
+      </p:sp>
+      <p:sp>
+        <p:nvSpPr>
+          <p:cNvPr id="3" name="Rectangle 2"/>
+          <p:cNvSpPr/>
+          <p:nvPr/>
+        </p:nvSpPr>
+        <p:spPr>
+          <a:xfrm>
+            <a:off x="0" y="969264"/>
+            <a:ext cx="12191695" cy="36576"/>
+          </a:xfrm>
+          <a:prstGeom prst="rect">
+            <a:avLst/>
+          </a:prstGeom>
+          <a:solidFill>
+            <a:srgbClr val="D97706"/>
+          </a:solidFill>
+          <a:ln>
+            <a:noFill/>
+          </a:ln>
+        </p:spPr>
+        <p:style>
+          <a:lnRef idx="1">
+            <a:schemeClr val="accent1"/>
+          </a:lnRef>
+          <a:fillRef idx="3">
+            <a:schemeClr val="accent1"/>
+          </a:fillRef>
+          <a:effectRef idx="2">
+            <a:schemeClr val="accent1"/>
+          </a:effectRef>
+          <a:fontRef idx="minor">
+            <a:schemeClr val="lt1"/>
+          </a:fontRef>
+        </p:style>
+        <p:txBody>
+          <a:bodyPr rtlCol="0" anchor="ctr"/>
+          <a:lstStyle/>
+          <a:p>
+            <a:pPr algn="ctr"/>
+          </a:p>
+        </p:txBody>
+      </p:sp>
+      <p:sp>
+        <p:nvSpPr>
+          <p:cNvPr id="4" name="TextBox 3"/>
+          <p:cNvSpPr txBox="1"/>
+          <p:nvPr/>
+        </p:nvSpPr>
+        <p:spPr>
+          <a:xfrm>
+            <a:off x="731520" y="164592"/>
+            <a:ext cx="8412480" cy="685800"/>
+          </a:xfrm>
+          <a:prstGeom prst="rect">
+            <a:avLst/>
+          </a:prstGeom>
+          <a:noFill/>
+        </p:spPr>
+        <p:txBody>
+          <a:bodyPr wrap="none">
+            <a:spAutoFit/>
+          </a:bodyPr>
+          <a:lstStyle/>
+          <a:p>
+            <a:pPr>
+              <a:defRPr b="1" sz="2200">
+                <a:solidFill>
+                  <a:srgbClr val="F8FAFC"/>
+                </a:solidFill>
+              </a:defRPr>
+            </a:pPr>
+            <a:r>
+              <a:t>3.2.4 Sliding Window Flow Control: Stop-and-Wait vs GBN vs Selective Repeat</a:t>
+            </a:r>
+          </a:p>
+        </p:txBody>
+      </p:sp>
+      <p:sp>
+        <p:nvSpPr>
+          <p:cNvPr id="5" name="TextBox 4"/>
+          <p:cNvSpPr txBox="1"/>
+          <p:nvPr/>
+        </p:nvSpPr>
+        <p:spPr>
+          <a:xfrm>
+            <a:off x="8229600" y="164592"/>
+            <a:ext cx="3291840" cy="685800"/>
+          </a:xfrm>
+          <a:prstGeom prst="rect">
+            <a:avLst/>
+          </a:prstGeom>
+          <a:noFill/>
+        </p:spPr>
+        <p:txBody>
+          <a:bodyPr wrap="none">
+            <a:spAutoFit/>
+          </a:bodyPr>
+          <a:lstStyle/>
+          <a:p>
+            <a:pPr algn="r">
+              <a:defRPr b="1" sz="1300">
+                <a:solidFill>
+                  <a:srgbClr val="D97706"/>
+                </a:solidFill>
+              </a:defRPr>
+            </a:pPr>
+            <a:r>
+              <a:t>M3.2 ARQ PROTOCOLS</a:t>
+            </a:r>
+          </a:p>
+        </p:txBody>
+      </p:sp>
+      <p:sp>
+        <p:nvSpPr>
+          <p:cNvPr id="6" name="Rounded Rectangle 5"/>
+          <p:cNvSpPr/>
+          <p:nvPr/>
+        </p:nvSpPr>
+        <p:spPr>
+          <a:xfrm>
+            <a:off x="731520" y="1234440"/>
+            <a:ext cx="3383280" cy="4892040"/>
+          </a:xfrm>
+          <a:prstGeom prst="roundRect">
+            <a:avLst/>
+          </a:prstGeom>
+          <a:solidFill>
+            <a:srgbClr val="F8FAFC"/>
+          </a:solidFill>
+          <a:ln w="19050">
+            <a:solidFill>
+              <a:srgbClr val="0F1E4A"/>
+            </a:solidFill>
+          </a:ln>
+        </p:spPr>
+        <p:style>
+          <a:lnRef idx="1">
+            <a:schemeClr val="accent1"/>
+          </a:lnRef>
+          <a:fillRef idx="3">
+            <a:schemeClr val="accent1"/>
+          </a:fillRef>
+          <a:effectRef idx="2">
+            <a:schemeClr val="accent1"/>
+          </a:effectRef>
+          <a:fontRef idx="minor">
+            <a:schemeClr val="lt1"/>
+          </a:fontRef>
+        </p:style>
+        <p:txBody>
+          <a:bodyPr rtlCol="0" anchor="ctr"/>
+          <a:lstStyle/>
+          <a:p>
+            <a:pPr algn="ctr"/>
+          </a:p>
+        </p:txBody>
+      </p:sp>
+      <p:sp>
+        <p:nvSpPr>
+          <p:cNvPr id="7" name="TextBox 6"/>
+          <p:cNvSpPr txBox="1"/>
+          <p:nvPr/>
+        </p:nvSpPr>
+        <p:spPr>
+          <a:xfrm>
+            <a:off x="914400" y="1371600"/>
+            <a:ext cx="3017520" cy="4572000"/>
+          </a:xfrm>
+          <a:prstGeom prst="rect">
+            <a:avLst/>
+          </a:prstGeom>
+          <a:noFill/>
+        </p:spPr>
+        <p:txBody>
+          <a:bodyPr wrap="square">
+            <a:spAutoFit/>
+          </a:bodyPr>
+          <a:lstStyle/>
+          <a:p>
+            <a:pPr>
+              <a:spcAft>
+                <a:spcPts val="1000"/>
+              </a:spcAft>
+              <a:defRPr b="1" sz="1550">
+                <a:solidFill>
+                  <a:srgbClr val="0F1E4A"/>
+                </a:solidFill>
+              </a:defRPr>
+            </a:pPr>
+            <a:r>
+              <a:t>Stop-and-Wait ARQ</a:t>
+            </a:r>
+          </a:p>
+          <a:p>
+            <a:pPr>
+              <a:spcAft>
+                <a:spcPts val="500"/>
+              </a:spcAft>
+              <a:defRPr sz="1200">
+                <a:solidFill>
+                  <a:srgbClr val="0F172A"/>
+                </a:solidFill>
+              </a:defRPr>
+            </a:pPr>
+            <a:r>
+              <a:t>• Window Size: $W_s = 1$, $W_r = 1$</a:t>
+            </a:r>
+          </a:p>
+          <a:p>
+            <a:pPr>
+              <a:spcAft>
+                <a:spcPts val="500"/>
+              </a:spcAft>
+              <a:defRPr sz="1200">
+                <a:solidFill>
+                  <a:srgbClr val="0F172A"/>
+                </a:solidFill>
+              </a:defRPr>
+            </a:pPr>
+            <a:r>
+              <a:t>• Sequence Bits: 1-bit ($m=1$, sequence numbers 0 and 1)</a:t>
+            </a:r>
+          </a:p>
+          <a:p>
+            <a:pPr>
+              <a:spcAft>
+                <a:spcPts val="500"/>
+              </a:spcAft>
+              <a:defRPr sz="1200">
+                <a:solidFill>
+                  <a:srgbClr val="0F172A"/>
+                </a:solidFill>
+              </a:defRPr>
+            </a:pPr>
+            <a:r>
+              <a:t>• Efficiency: Extremely low on high-bandwidth-delay product links: $\eta = 1 / (1 + 2a)$ where $a = t_{prop} / t_{trans}$</a:t>
+            </a:r>
+          </a:p>
+          <a:p>
+            <a:pPr>
+              <a:spcAft>
+                <a:spcPts val="500"/>
+              </a:spcAft>
+              <a:defRPr sz="1200">
+                <a:solidFill>
+                  <a:srgbClr val="0F172A"/>
+                </a:solidFill>
+              </a:defRPr>
+            </a:pPr>
+            <a:r>
+              <a:t>• Buffering: 1 frame buffer at sender and receiver</a:t>
+            </a:r>
+          </a:p>
+        </p:txBody>
+      </p:sp>
+      <p:sp>
+        <p:nvSpPr>
+          <p:cNvPr id="8" name="Rounded Rectangle 7"/>
+          <p:cNvSpPr/>
+          <p:nvPr/>
+        </p:nvSpPr>
+        <p:spPr>
+          <a:xfrm>
+            <a:off x="4389120" y="1234440"/>
+            <a:ext cx="3383280" cy="4892040"/>
           </a:xfrm>
           <a:prstGeom prst="roundRect">
             <a:avLst/>
@@ -4670,7 +5554,7 @@
           </a:solidFill>
           <a:ln w="19050">
             <a:solidFill>
-              <a:srgbClr val="0F1E4A"/>
+              <a:srgbClr val="0E7490"/>
             </a:solidFill>
           </a:ln>
         </p:spPr>
@@ -4704,8 +5588,8 @@
         </p:nvSpPr>
         <p:spPr>
           <a:xfrm>
-            <a:off x="6492240" y="1417320"/>
-            <a:ext cx="4846320" cy="4572000"/>
+            <a:off x="4572000" y="1371600"/>
+            <a:ext cx="3017520" cy="4572000"/>
           </a:xfrm>
           <a:prstGeom prst="rect">
             <a:avLst/>
@@ -4720,105 +5604,135 @@
           <a:p>
             <a:pPr>
               <a:spcAft>
-                <a:spcPts val="1200"/>
-              </a:spcAft>
-              <a:defRPr b="1" sz="1600">
+                <a:spcPts val="1000"/>
+              </a:spcAft>
+              <a:defRPr b="1" sz="1550">
                 <a:solidFill>
                   <a:srgbClr val="0E7490"/>
                 </a:solidFill>
               </a:defRPr>
             </a:pPr>
             <a:r>
-              <a:t>Selective Repeat ARQ (SR)</a:t>
-            </a:r>
-          </a:p>
-          <a:p>
-            <a:pPr>
-              <a:spcAft>
-                <a:spcPts val="600"/>
-              </a:spcAft>
-              <a:defRPr sz="1250">
-                <a:solidFill>
-                  <a:srgbClr val="1E293B"/>
-                </a:solidFill>
-              </a:defRPr>
-            </a:pPr>
-            <a:r>
-              <a:t>• Sender Window: Size $N &gt; 1$</a:t>
-            </a:r>
-          </a:p>
-          <a:p>
-            <a:pPr>
-              <a:spcAft>
-                <a:spcPts val="600"/>
-              </a:spcAft>
-              <a:defRPr sz="1250">
-                <a:solidFill>
-                  <a:srgbClr val="1E293B"/>
-                </a:solidFill>
-              </a:defRPr>
-            </a:pPr>
-            <a:r>
-              <a:t>• Receiver Window: Size $N &gt; 1$; buffers out-of-order frames</a:t>
-            </a:r>
-          </a:p>
-          <a:p>
-            <a:pPr>
-              <a:spcAft>
-                <a:spcPts val="600"/>
-              </a:spcAft>
-              <a:defRPr sz="1250">
-                <a:solidFill>
-                  <a:srgbClr val="1E293B"/>
-                </a:solidFill>
-              </a:defRPr>
-            </a:pPr>
-            <a:r>
-              <a:t>• On Damaged Frame: Sends Negative ACK (NAK) or waits for timeout</a:t>
-            </a:r>
-          </a:p>
-          <a:p>
-            <a:pPr>
-              <a:spcAft>
-                <a:spcPts val="600"/>
-              </a:spcAft>
-              <a:defRPr sz="1250">
-                <a:solidFill>
-                  <a:srgbClr val="1E293B"/>
-                </a:solidFill>
-              </a:defRPr>
-            </a:pPr>
-            <a:r>
-              <a:t>• On Timeout: Retransmits ONLY the specific damaged/lost frame</a:t>
-            </a:r>
-          </a:p>
-          <a:p>
-            <a:pPr>
-              <a:spcAft>
-                <a:spcPts val="600"/>
-              </a:spcAft>
-              <a:defRPr sz="1250">
-                <a:solidFill>
-                  <a:srgbClr val="1E293B"/>
-                </a:solidFill>
-              </a:defRPr>
-            </a:pPr>
-            <a:r>
-              <a:t>• Sequence Numbers: Requires sequence numbers $\ge 2N$</a:t>
-            </a:r>
-          </a:p>
-        </p:txBody>
-      </p:sp>
-      <p:sp>
-        <p:nvSpPr>
-          <p:cNvPr id="10" name="TextBox 9"/>
+              <a:t>Go-Back-N (GBN) ARQ</a:t>
+            </a:r>
+          </a:p>
+          <a:p>
+            <a:pPr>
+              <a:spcAft>
+                <a:spcPts val="500"/>
+              </a:spcAft>
+              <a:defRPr sz="1200">
+                <a:solidFill>
+                  <a:srgbClr val="0F172A"/>
+                </a:solidFill>
+              </a:defRPr>
+            </a:pPr>
+            <a:r>
+              <a:t>• Window Size: $W_s = 2^m - 1$, $W_r = 1$ (Cumulative ACKs)</a:t>
+            </a:r>
+          </a:p>
+          <a:p>
+            <a:pPr>
+              <a:spcAft>
+                <a:spcPts val="500"/>
+              </a:spcAft>
+              <a:defRPr sz="1200">
+                <a:solidFill>
+                  <a:srgbClr val="0F172A"/>
+                </a:solidFill>
+              </a:defRPr>
+            </a:pPr>
+            <a:r>
+              <a:t>• On Loss: Discards all subsequent out-of-order frames; retransmits entire window from lost frame</a:t>
+            </a:r>
+          </a:p>
+          <a:p>
+            <a:pPr>
+              <a:spcAft>
+                <a:spcPts val="500"/>
+              </a:spcAft>
+              <a:defRPr sz="1200">
+                <a:solidFill>
+                  <a:srgbClr val="0F172A"/>
+                </a:solidFill>
+              </a:defRPr>
+            </a:pPr>
+            <a:r>
+              <a:t>• Sender Buffer: Buffers $W_s$ frames; receiver requires zero buffer</a:t>
+            </a:r>
+          </a:p>
+          <a:p>
+            <a:pPr>
+              <a:spcAft>
+                <a:spcPts val="500"/>
+              </a:spcAft>
+              <a:defRPr sz="1200">
+                <a:solidFill>
+                  <a:srgbClr val="0F172A"/>
+                </a:solidFill>
+              </a:defRPr>
+            </a:pPr>
+            <a:r>
+              <a:t>• Efficiency: High efficiency unless error rate is severe</a:t>
+            </a:r>
+          </a:p>
+        </p:txBody>
+      </p:sp>
+      <p:sp>
+        <p:nvSpPr>
+          <p:cNvPr id="10" name="Rounded Rectangle 9"/>
+          <p:cNvSpPr/>
+          <p:nvPr/>
+        </p:nvSpPr>
+        <p:spPr>
+          <a:xfrm>
+            <a:off x="8046720" y="1234440"/>
+            <a:ext cx="3383280" cy="4892040"/>
+          </a:xfrm>
+          <a:prstGeom prst="roundRect">
+            <a:avLst/>
+          </a:prstGeom>
+          <a:solidFill>
+            <a:srgbClr val="F8FAFC"/>
+          </a:solidFill>
+          <a:ln w="19050">
+            <a:solidFill>
+              <a:srgbClr val="D97706"/>
+            </a:solidFill>
+          </a:ln>
+        </p:spPr>
+        <p:style>
+          <a:lnRef idx="1">
+            <a:schemeClr val="accent1"/>
+          </a:lnRef>
+          <a:fillRef idx="3">
+            <a:schemeClr val="accent1"/>
+          </a:fillRef>
+          <a:effectRef idx="2">
+            <a:schemeClr val="accent1"/>
+          </a:effectRef>
+          <a:fontRef idx="minor">
+            <a:schemeClr val="lt1"/>
+          </a:fontRef>
+        </p:style>
+        <p:txBody>
+          <a:bodyPr rtlCol="0" anchor="ctr"/>
+          <a:lstStyle/>
+          <a:p>
+            <a:pPr algn="ctr"/>
+          </a:p>
+        </p:txBody>
+      </p:sp>
+      <p:sp>
+        <p:nvSpPr>
+          <p:cNvPr id="11" name="TextBox 10"/>
           <p:cNvSpPr txBox="1"/>
           <p:nvPr/>
         </p:nvSpPr>
         <p:spPr>
           <a:xfrm>
-            <a:off x="731520" y="6309360"/>
-            <a:ext cx="10789920" cy="365760"/>
+            <a:off x="8229600" y="1371600"/>
+            <a:ext cx="3017520" cy="4572000"/>
           </a:xfrm>
           <a:prstGeom prst="rect">
             <a:avLst/>
@@ -4826,6 +5740,104 @@
           <a:noFill/>
         </p:spPr>
         <p:txBody>
+          <a:bodyPr wrap="square">
+            <a:spAutoFit/>
+          </a:bodyPr>
+          <a:lstStyle/>
+          <a:p>
+            <a:pPr>
+              <a:spcAft>
+                <a:spcPts val="1000"/>
+              </a:spcAft>
+              <a:defRPr b="1" sz="1550">
+                <a:solidFill>
+                  <a:srgbClr val="D97706"/>
+                </a:solidFill>
+              </a:defRPr>
+            </a:pPr>
+            <a:r>
+              <a:t>Selective Repeat (SR) ARQ</a:t>
+            </a:r>
+          </a:p>
+          <a:p>
+            <a:pPr>
+              <a:spcAft>
+                <a:spcPts val="500"/>
+              </a:spcAft>
+              <a:defRPr sz="1200">
+                <a:solidFill>
+                  <a:srgbClr val="0F172A"/>
+                </a:solidFill>
+              </a:defRPr>
+            </a:pPr>
+            <a:r>
+              <a:t>• Window Size: $W_s = 2^{m-1}$, $W_r = 2^{m-1}$ (Individual ACKs)</a:t>
+            </a:r>
+          </a:p>
+          <a:p>
+            <a:pPr>
+              <a:spcAft>
+                <a:spcPts val="500"/>
+              </a:spcAft>
+              <a:defRPr sz="1200">
+                <a:solidFill>
+                  <a:srgbClr val="0F172A"/>
+                </a:solidFill>
+              </a:defRPr>
+            </a:pPr>
+            <a:r>
+              <a:t>• On Loss: Receiver buffers out-of-order frames; sender retransmits **only the lost frame**</a:t>
+            </a:r>
+          </a:p>
+          <a:p>
+            <a:pPr>
+              <a:spcAft>
+                <a:spcPts val="500"/>
+              </a:spcAft>
+              <a:defRPr sz="1200">
+                <a:solidFill>
+                  <a:srgbClr val="0F172A"/>
+                </a:solidFill>
+              </a:defRPr>
+            </a:pPr>
+            <a:r>
+              <a:t>• Buffer Needs: Both sender and receiver maintain $2^{m-1}$ buffer queues</a:t>
+            </a:r>
+          </a:p>
+          <a:p>
+            <a:pPr>
+              <a:spcAft>
+                <a:spcPts val="500"/>
+              </a:spcAft>
+              <a:defRPr sz="1200">
+                <a:solidFill>
+                  <a:srgbClr val="0F172A"/>
+                </a:solidFill>
+              </a:defRPr>
+            </a:pPr>
+            <a:r>
+              <a:t>• Efficiency: Optimal bandwidth utilization on noisy channels</a:t>
+            </a:r>
+          </a:p>
+        </p:txBody>
+      </p:sp>
+      <p:sp>
+        <p:nvSpPr>
+          <p:cNvPr id="12" name="TextBox 11"/>
+          <p:cNvSpPr txBox="1"/>
+          <p:nvPr/>
+        </p:nvSpPr>
+        <p:spPr>
+          <a:xfrm>
+            <a:off x="731520" y="6327648"/>
+            <a:ext cx="10789920" cy="320040"/>
+          </a:xfrm>
+          <a:prstGeom prst="rect">
+            <a:avLst/>
+          </a:prstGeom>
+          <a:noFill/>
+        </p:spPr>
+        <p:txBody>
           <a:bodyPr wrap="none">
             <a:spAutoFit/>
           </a:bodyPr>
@@ -4840,6 +5852,541 @@
             </a:pPr>
             <a:r>
               <a:t>PCCST501 Computer Networks | KTU 2024 Scheme | Prof. Anju Markose | Assistant Professor, Dept. of CSE | VJCET</a:t>
+            </a:r>
+          </a:p>
+        </p:txBody>
+      </p:sp>
+      <p:sp>
+        <p:nvSpPr>
+          <p:cNvPr id="13" name="TextBox 12"/>
+          <p:cNvSpPr txBox="1"/>
+          <p:nvPr/>
+        </p:nvSpPr>
+        <p:spPr>
+          <a:xfrm>
+            <a:off x="6858000" y="6327648"/>
+            <a:ext cx="4572000" cy="320040"/>
+          </a:xfrm>
+          <a:prstGeom prst="rect">
+            <a:avLst/>
+          </a:prstGeom>
+          <a:noFill/>
+        </p:spPr>
+        <p:txBody>
+          <a:bodyPr wrap="none">
+            <a:spAutoFit/>
+          </a:bodyPr>
+          <a:lstStyle/>
+          <a:p>
+            <a:pPr algn="r">
+              <a:defRPr sz="950">
+                <a:solidFill>
+                  <a:srgbClr val="64748B"/>
+                </a:solidFill>
+              </a:defRPr>
+            </a:pPr>
+            <a:r>
+              <a:t>Dept. of CSE, VJCET</a:t>
+            </a:r>
+          </a:p>
+        </p:txBody>
+      </p:sp>
+    </p:spTree>
+  </p:cSld>
+  <p:clrMapOvr>
+    <a:masterClrMapping/>
+  </p:clrMapOvr>
+</p:sld>
+</file>
+
+<file path=ppt/slides/slide6.xml><?xml version="1.0" encoding="utf-8"?>
+<p:sld xmlns:a="http://schemas.openxmlformats.org/drawingml/2006/main" xmlns:p="http://schemas.openxmlformats.org/presentationml/2006/main" xmlns:r="http://schemas.openxmlformats.org/officeDocument/2006/relationships">
+  <p:cSld>
+    <p:spTree>
+      <p:nvGrpSpPr>
+        <p:cNvPr id="1" name=""/>
+        <p:cNvGrpSpPr/>
+        <p:nvPr/>
+      </p:nvGrpSpPr>
+      <p:grpSpPr/>
+      <p:sp>
+        <p:nvSpPr>
+          <p:cNvPr id="2" name="Rectangle 1"/>
+          <p:cNvSpPr/>
+          <p:nvPr/>
+        </p:nvSpPr>
+        <p:spPr>
+          <a:xfrm>
+            <a:off x="0" y="0"/>
+            <a:ext cx="12191695" cy="1005840"/>
+          </a:xfrm>
+          <a:prstGeom prst="rect">
+            <a:avLst/>
+          </a:prstGeom>
+          <a:solidFill>
+            <a:srgbClr val="0F1E4A"/>
+          </a:solidFill>
+          <a:ln>
+            <a:noFill/>
+          </a:ln>
+        </p:spPr>
+        <p:style>
+          <a:lnRef idx="1">
+            <a:schemeClr val="accent1"/>
+          </a:lnRef>
+          <a:fillRef idx="3">
+            <a:schemeClr val="accent1"/>
+          </a:fillRef>
+          <a:effectRef idx="2">
+            <a:schemeClr val="accent1"/>
+          </a:effectRef>
+          <a:fontRef idx="minor">
+            <a:schemeClr val="lt1"/>
+          </a:fontRef>
+        </p:style>
+        <p:txBody>
+          <a:bodyPr rtlCol="0" anchor="ctr"/>
+          <a:lstStyle/>
+          <a:p>
+            <a:pPr algn="ctr"/>
+          </a:p>
+        </p:txBody>
+      </p:sp>
+      <p:sp>
+        <p:nvSpPr>
+          <p:cNvPr id="3" name="Rectangle 2"/>
+          <p:cNvSpPr/>
+          <p:nvPr/>
+        </p:nvSpPr>
+        <p:spPr>
+          <a:xfrm>
+            <a:off x="0" y="969264"/>
+            <a:ext cx="12191695" cy="36576"/>
+          </a:xfrm>
+          <a:prstGeom prst="rect">
+            <a:avLst/>
+          </a:prstGeom>
+          <a:solidFill>
+            <a:srgbClr val="D97706"/>
+          </a:solidFill>
+          <a:ln>
+            <a:noFill/>
+          </a:ln>
+        </p:spPr>
+        <p:style>
+          <a:lnRef idx="1">
+            <a:schemeClr val="accent1"/>
+          </a:lnRef>
+          <a:fillRef idx="3">
+            <a:schemeClr val="accent1"/>
+          </a:fillRef>
+          <a:effectRef idx="2">
+            <a:schemeClr val="accent1"/>
+          </a:effectRef>
+          <a:fontRef idx="minor">
+            <a:schemeClr val="lt1"/>
+          </a:fontRef>
+        </p:style>
+        <p:txBody>
+          <a:bodyPr rtlCol="0" anchor="ctr"/>
+          <a:lstStyle/>
+          <a:p>
+            <a:pPr algn="ctr"/>
+          </a:p>
+        </p:txBody>
+      </p:sp>
+      <p:sp>
+        <p:nvSpPr>
+          <p:cNvPr id="4" name="TextBox 3"/>
+          <p:cNvSpPr txBox="1"/>
+          <p:nvPr/>
+        </p:nvSpPr>
+        <p:spPr>
+          <a:xfrm>
+            <a:off x="731520" y="164592"/>
+            <a:ext cx="8412480" cy="685800"/>
+          </a:xfrm>
+          <a:prstGeom prst="rect">
+            <a:avLst/>
+          </a:prstGeom>
+          <a:noFill/>
+        </p:spPr>
+        <p:txBody>
+          <a:bodyPr wrap="none">
+            <a:spAutoFit/>
+          </a:bodyPr>
+          <a:lstStyle/>
+          <a:p>
+            <a:pPr>
+              <a:defRPr b="1" sz="2100">
+                <a:solidFill>
+                  <a:srgbClr val="F8FAFC"/>
+                </a:solidFill>
+              </a:defRPr>
+            </a:pPr>
+            <a:r>
+              <a:t>🎯 Exam Booster &amp; Review: Error Detection &amp; Flow Control</a:t>
+            </a:r>
+          </a:p>
+        </p:txBody>
+      </p:sp>
+      <p:sp>
+        <p:nvSpPr>
+          <p:cNvPr id="5" name="TextBox 4"/>
+          <p:cNvSpPr txBox="1"/>
+          <p:nvPr/>
+        </p:nvSpPr>
+        <p:spPr>
+          <a:xfrm>
+            <a:off x="8229600" y="164592"/>
+            <a:ext cx="3291840" cy="685800"/>
+          </a:xfrm>
+          <a:prstGeom prst="rect">
+            <a:avLst/>
+          </a:prstGeom>
+          <a:noFill/>
+        </p:spPr>
+        <p:txBody>
+          <a:bodyPr wrap="none">
+            <a:spAutoFit/>
+          </a:bodyPr>
+          <a:lstStyle/>
+          <a:p>
+            <a:pPr algn="r">
+              <a:defRPr b="1" sz="1300">
+                <a:solidFill>
+                  <a:srgbClr val="D97706"/>
+                </a:solidFill>
+              </a:defRPr>
+            </a:pPr>
+            <a:r>
+              <a:t>M3.2</a:t>
+            </a:r>
+          </a:p>
+        </p:txBody>
+      </p:sp>
+      <p:sp>
+        <p:nvSpPr>
+          <p:cNvPr id="6" name="Rounded Rectangle 5"/>
+          <p:cNvSpPr/>
+          <p:nvPr/>
+        </p:nvSpPr>
+        <p:spPr>
+          <a:xfrm>
+            <a:off x="731520" y="1234440"/>
+            <a:ext cx="5303520" cy="4892040"/>
+          </a:xfrm>
+          <a:prstGeom prst="roundRect">
+            <a:avLst/>
+          </a:prstGeom>
+          <a:solidFill>
+            <a:srgbClr val="FEF3C7"/>
+          </a:solidFill>
+          <a:ln w="19050">
+            <a:solidFill>
+              <a:srgbClr val="D97706"/>
+            </a:solidFill>
+          </a:ln>
+        </p:spPr>
+        <p:style>
+          <a:lnRef idx="1">
+            <a:schemeClr val="accent1"/>
+          </a:lnRef>
+          <a:fillRef idx="3">
+            <a:schemeClr val="accent1"/>
+          </a:fillRef>
+          <a:effectRef idx="2">
+            <a:schemeClr val="accent1"/>
+          </a:effectRef>
+          <a:fontRef idx="minor">
+            <a:schemeClr val="lt1"/>
+          </a:fontRef>
+        </p:style>
+        <p:txBody>
+          <a:bodyPr rtlCol="0" anchor="ctr"/>
+          <a:lstStyle/>
+          <a:p>
+            <a:pPr algn="ctr"/>
+          </a:p>
+        </p:txBody>
+      </p:sp>
+      <p:sp>
+        <p:nvSpPr>
+          <p:cNvPr id="7" name="TextBox 6"/>
+          <p:cNvSpPr txBox="1"/>
+          <p:nvPr/>
+        </p:nvSpPr>
+        <p:spPr>
+          <a:xfrm>
+            <a:off x="914400" y="1371600"/>
+            <a:ext cx="4937760" cy="4572000"/>
+          </a:xfrm>
+          <a:prstGeom prst="rect">
+            <a:avLst/>
+          </a:prstGeom>
+          <a:noFill/>
+        </p:spPr>
+        <p:txBody>
+          <a:bodyPr wrap="square">
+            <a:spAutoFit/>
+          </a:bodyPr>
+          <a:lstStyle/>
+          <a:p>
+            <a:pPr>
+              <a:spcAft>
+                <a:spcPts val="1000"/>
+              </a:spcAft>
+              <a:defRPr b="1" sz="1450">
+                <a:solidFill>
+                  <a:srgbClr val="D97706"/>
+                </a:solidFill>
+              </a:defRPr>
+            </a:pPr>
+            <a:r>
+              <a:t>📚 KTU High-Yield Questions (K3 Apply)</a:t>
+            </a:r>
+          </a:p>
+          <a:p>
+            <a:pPr>
+              <a:spcAft>
+                <a:spcPts val="700"/>
+              </a:spcAft>
+              <a:defRPr sz="1200">
+                <a:solidFill>
+                  <a:srgbClr val="0F172A"/>
+                </a:solidFill>
+              </a:defRPr>
+            </a:pPr>
+            <a:r>
+              <a:t>Q: Explain CRC error detection with a polynomial division example. Why is CRC implemented in hardware with LFSR shift registers? (8 Marks)</a:t>
+            </a:r>
+          </a:p>
+          <a:p>
+            <a:pPr>
+              <a:spcAft>
+                <a:spcPts val="700"/>
+              </a:spcAft>
+              <a:defRPr sz="1200">
+                <a:solidFill>
+                  <a:srgbClr val="0F172A"/>
+                </a:solidFill>
+              </a:defRPr>
+            </a:pPr>
+            <a:r>
+              <a:t>Q: Derive the maximum sender window size for Go-Back-N ($2^m - 1$) and Selective Repeat ($2^{m-1}$). Explain why exceeding these limits causes protocol failure. (8 Marks)</a:t>
+            </a:r>
+          </a:p>
+          <a:p>
+            <a:pPr>
+              <a:spcAft>
+                <a:spcPts val="700"/>
+              </a:spcAft>
+              <a:defRPr sz="1200">
+                <a:solidFill>
+                  <a:srgbClr val="0F172A"/>
+                </a:solidFill>
+              </a:defRPr>
+            </a:pPr>
+            <a:r>
+              <a:t>Q: Explain Hamming (7,4) code with syndrome error correction calculation. (7 Marks)</a:t>
+            </a:r>
+          </a:p>
+        </p:txBody>
+      </p:sp>
+      <p:sp>
+        <p:nvSpPr>
+          <p:cNvPr id="8" name="Rounded Rectangle 7"/>
+          <p:cNvSpPr/>
+          <p:nvPr/>
+        </p:nvSpPr>
+        <p:spPr>
+          <a:xfrm>
+            <a:off x="6309360" y="1234440"/>
+            <a:ext cx="5212080" cy="4892040"/>
+          </a:xfrm>
+          <a:prstGeom prst="roundRect">
+            <a:avLst/>
+          </a:prstGeom>
+          <a:solidFill>
+            <a:srgbClr val="EEF2FF"/>
+          </a:solidFill>
+          <a:ln w="19050">
+            <a:solidFill>
+              <a:srgbClr val="0E7490"/>
+            </a:solidFill>
+          </a:ln>
+        </p:spPr>
+        <p:style>
+          <a:lnRef idx="1">
+            <a:schemeClr val="accent1"/>
+          </a:lnRef>
+          <a:fillRef idx="3">
+            <a:schemeClr val="accent1"/>
+          </a:fillRef>
+          <a:effectRef idx="2">
+            <a:schemeClr val="accent1"/>
+          </a:effectRef>
+          <a:fontRef idx="minor">
+            <a:schemeClr val="lt1"/>
+          </a:fontRef>
+        </p:style>
+        <p:txBody>
+          <a:bodyPr rtlCol="0" anchor="ctr"/>
+          <a:lstStyle/>
+          <a:p>
+            <a:pPr algn="ctr"/>
+          </a:p>
+        </p:txBody>
+      </p:sp>
+      <p:sp>
+        <p:nvSpPr>
+          <p:cNvPr id="9" name="TextBox 8"/>
+          <p:cNvSpPr txBox="1"/>
+          <p:nvPr/>
+        </p:nvSpPr>
+        <p:spPr>
+          <a:xfrm>
+            <a:off x="6492240" y="1371600"/>
+            <a:ext cx="4846320" cy="4572000"/>
+          </a:xfrm>
+          <a:prstGeom prst="rect">
+            <a:avLst/>
+          </a:prstGeom>
+          <a:noFill/>
+        </p:spPr>
+        <p:txBody>
+          <a:bodyPr wrap="square">
+            <a:spAutoFit/>
+          </a:bodyPr>
+          <a:lstStyle/>
+          <a:p>
+            <a:pPr>
+              <a:spcAft>
+                <a:spcPts val="1000"/>
+              </a:spcAft>
+              <a:defRPr b="1" sz="1450">
+                <a:solidFill>
+                  <a:srgbClr val="0E7490"/>
+                </a:solidFill>
+              </a:defRPr>
+            </a:pPr>
+            <a:r>
+              <a:t>💡 Critical Conceptual Takeaways</a:t>
+            </a:r>
+          </a:p>
+          <a:p>
+            <a:pPr>
+              <a:spcAft>
+                <a:spcPts val="600"/>
+              </a:spcAft>
+              <a:defRPr sz="1200">
+                <a:solidFill>
+                  <a:srgbClr val="0F172A"/>
+                </a:solidFill>
+              </a:defRPr>
+            </a:pPr>
+            <a:r>
+              <a:t>✔ CRC detects all single-bit, double-bit, odd numbers of errors, and burst errors up to generator polynomial degree $r$.</a:t>
+            </a:r>
+          </a:p>
+          <a:p>
+            <a:pPr>
+              <a:spcAft>
+                <a:spcPts val="600"/>
+              </a:spcAft>
+              <a:defRPr sz="1200">
+                <a:solidFill>
+                  <a:srgbClr val="0F172A"/>
+                </a:solidFill>
+              </a:defRPr>
+            </a:pPr>
+            <a:r>
+              <a:t>✔ Go-Back-N window is $2^m - 1$ to prevent receiver from mistaking duplicate frames for new ones.</a:t>
+            </a:r>
+          </a:p>
+          <a:p>
+            <a:pPr>
+              <a:spcAft>
+                <a:spcPts val="600"/>
+              </a:spcAft>
+              <a:defRPr sz="1200">
+                <a:solidFill>
+                  <a:srgbClr val="0F172A"/>
+                </a:solidFill>
+              </a:defRPr>
+            </a:pPr>
+            <a:r>
+              <a:t>✔ Selective Repeat requires equal sender and receiver window sizes bounded at $2^{m-1}$.</a:t>
+            </a:r>
+          </a:p>
+        </p:txBody>
+      </p:sp>
+      <p:sp>
+        <p:nvSpPr>
+          <p:cNvPr id="10" name="TextBox 9"/>
+          <p:cNvSpPr txBox="1"/>
+          <p:nvPr/>
+        </p:nvSpPr>
+        <p:spPr>
+          <a:xfrm>
+            <a:off x="731520" y="6327648"/>
+            <a:ext cx="10789920" cy="320040"/>
+          </a:xfrm>
+          <a:prstGeom prst="rect">
+            <a:avLst/>
+          </a:prstGeom>
+          <a:noFill/>
+        </p:spPr>
+        <p:txBody>
+          <a:bodyPr wrap="none">
+            <a:spAutoFit/>
+          </a:bodyPr>
+          <a:lstStyle/>
+          <a:p>
+            <a:pPr>
+              <a:defRPr sz="950">
+                <a:solidFill>
+                  <a:srgbClr val="64748B"/>
+                </a:solidFill>
+              </a:defRPr>
+            </a:pPr>
+            <a:r>
+              <a:t>PCCST501 Computer Networks | KTU 2024 Scheme | Prof. Anju Markose | Assistant Professor, Dept. of CSE | VJCET</a:t>
+            </a:r>
+          </a:p>
+        </p:txBody>
+      </p:sp>
+      <p:sp>
+        <p:nvSpPr>
+          <p:cNvPr id="11" name="TextBox 10"/>
+          <p:cNvSpPr txBox="1"/>
+          <p:nvPr/>
+        </p:nvSpPr>
+        <p:spPr>
+          <a:xfrm>
+            <a:off x="6858000" y="6327648"/>
+            <a:ext cx="4572000" cy="320040"/>
+          </a:xfrm>
+          <a:prstGeom prst="rect">
+            <a:avLst/>
+          </a:prstGeom>
+          <a:noFill/>
+        </p:spPr>
+        <p:txBody>
+          <a:bodyPr wrap="none">
+            <a:spAutoFit/>
+          </a:bodyPr>
+          <a:lstStyle/>
+          <a:p>
+            <a:pPr algn="r">
+              <a:defRPr sz="950">
+                <a:solidFill>
+                  <a:srgbClr val="64748B"/>
+                </a:solidFill>
+              </a:defRPr>
+            </a:pPr>
+            <a:r>
+              <a:t>Dept. of CSE, VJCET</a:t>
             </a:r>
           </a:p>
         </p:txBody>
